--- a/dist/초1/수학/수와연산/초1_수학_수와연산_03_가르기와모으기.pptx
+++ b/dist/초1/수학/수와연산/초1_수학_수와연산_03_가르기와모으기.pptx
@@ -121,13 +121,13 @@
   <p:extLst>
     <p:ext uri="{521415D9-36F7-43E2-AB2F-B90AF26B5E84}">
       <p14:sectionLst xmlns:p14="http://schemas.microsoft.com/office/powerpoint/2010/main">
-        <p14:section name="도입" id="{882c465c-7c28-f505-a1d8-38f70d47994d}">
+        <p14:section name="도입" id="{cc732871-a3ce-f9d6-0544-9550d9390663}">
           <p14:sldIdLst>
             <p14:sldId id="256"/>
             <p14:sldId id="257"/>
           </p14:sldIdLst>
         </p14:section>
-        <p14:section name="개념" id="{924421f7-a8a5-3e62-be3f-af3cd6537641}">
+        <p14:section name="개념" id="{af022fa3-2f8a-ac96-d099-130788791128}">
           <p14:sldIdLst>
             <p14:sldId id="258"/>
             <p14:sldId id="259"/>
@@ -136,26 +136,26 @@
             <p14:sldId id="262"/>
           </p14:sldIdLst>
         </p14:section>
-        <p14:section name="연습" id="{6492c5ee-fe9f-c68b-3624-d8b320fc0aca}">
+        <p14:section name="연습" id="{f5a01368-7a36-fa24-6f7d-6b4a864a7be4}">
           <p14:sldIdLst>
             <p14:sldId id="263"/>
             <p14:sldId id="264"/>
             <p14:sldId id="265"/>
           </p14:sldIdLst>
         </p14:section>
-        <p14:section name="확인" id="{9a2c4848-05b7-00b8-eac6-85e669149e6d}">
+        <p14:section name="확인" id="{150d466e-0b23-14cd-8390-28b4512f1f3d}">
           <p14:sldIdLst>
             <p14:sldId id="266"/>
             <p14:sldId id="267"/>
             <p14:sldId id="268"/>
           </p14:sldIdLst>
         </p14:section>
-        <p14:section name="정리" id="{16653fb8-96a5-a495-8a81-936e7d1b34d9}">
+        <p14:section name="정리" id="{94062f0b-aa40-49ab-b660-7c13850dbe1b}">
           <p14:sldIdLst>
             <p14:sldId id="269"/>
           </p14:sldIdLst>
         </p14:section>
-        <p14:section name="보충" id="{99eb1f00-2789-ccdf-e565-b524872bd9e6}">
+        <p14:section name="보충" id="{32aed304-d63b-75e8-9522-49efbe7e2f65}">
           <p14:sldIdLst>
             <p14:sldId id="270"/>
           </p14:sldIdLst>
@@ -3058,7 +3058,7 @@
           <a:bodyPr wrap="square" lIns="0" tIns="0" rIns="0" bIns="0" rtlCol="0" anchor="ctr"/>
           <a:lstStyle/>
           <a:p>
-            <a:pPr algn="l" indent="0" marL="0">
+            <a:pPr eaLnBrk="0" algn="l" indent="0" marL="0">
               <a:buNone/>
             </a:pPr>
             <a:r>
@@ -3099,7 +3099,7 @@
           <a:bodyPr wrap="square" lIns="0" tIns="0" rIns="0" bIns="0" rtlCol="0" anchor="t"/>
           <a:lstStyle/>
           <a:p>
-            <a:pPr indent="0" marL="0">
+            <a:pPr eaLnBrk="0" indent="0" marL="0">
               <a:buNone/>
             </a:pPr>
             <a:r>
@@ -3348,7 +3348,7 @@
           <a:bodyPr wrap="square" lIns="0" tIns="0" rIns="0" bIns="0" rtlCol="0" anchor="ctr"/>
           <a:lstStyle/>
           <a:p>
-            <a:pPr indent="0" marL="0">
+            <a:pPr eaLnBrk="0" indent="0" marL="0">
               <a:spcAft>
                 <a:spcPts val="600"/>
               </a:spcAft>
@@ -3368,7 +3368,7 @@
             <a:endParaRPr lang="ko-KR" sz="3200" dirty="0"/>
           </a:p>
           <a:p>
-            <a:pPr indent="0" marL="0">
+            <a:pPr eaLnBrk="0" indent="0" marL="0">
               <a:spcAft>
                 <a:spcPts val="600"/>
               </a:spcAft>
@@ -3388,7 +3388,7 @@
             <a:endParaRPr lang="ko-KR" sz="3200" dirty="0"/>
           </a:p>
           <a:p>
-            <a:pPr indent="0" marL="0">
+            <a:pPr eaLnBrk="0" indent="0" marL="0">
               <a:spcAft>
                 <a:spcPts val="600"/>
               </a:spcAft>
@@ -3457,7 +3457,7 @@
           <a:bodyPr wrap="square" lIns="0" tIns="0" rIns="0" bIns="0" rtlCol="0" anchor="ctr"/>
           <a:lstStyle/>
           <a:p>
-            <a:pPr algn="l" indent="0" marL="0">
+            <a:pPr eaLnBrk="0" algn="l" indent="0" marL="0">
               <a:buNone/>
             </a:pPr>
             <a:r>
@@ -3523,7 +3523,7 @@
           <a:bodyPr wrap="square" lIns="0" tIns="0" rIns="0" bIns="0" rtlCol="0" anchor="ctr"/>
           <a:lstStyle/>
           <a:p>
-            <a:pPr indent="0" marL="0">
+            <a:pPr eaLnBrk="0" indent="0" marL="0">
               <a:spcAft>
                 <a:spcPts val="600"/>
               </a:spcAft>
@@ -3592,7 +3592,7 @@
           <a:bodyPr wrap="square" lIns="0" tIns="0" rIns="0" bIns="0" rtlCol="0" anchor="ctr"/>
           <a:lstStyle/>
           <a:p>
-            <a:pPr indent="0" marL="0">
+            <a:pPr eaLnBrk="0" indent="0" marL="0">
               <a:spcAft>
                 <a:spcPts val="600"/>
               </a:spcAft>
@@ -3642,7 +3642,7 @@
           <a:bodyPr wrap="square" lIns="177800" tIns="0" rIns="177800" bIns="0" rtlCol="0" anchor="ctr"/>
           <a:lstStyle/>
           <a:p>
-            <a:pPr algn="l" indent="0" marL="0">
+            <a:pPr eaLnBrk="0" algn="l" indent="0" marL="0">
               <a:buNone/>
             </a:pPr>
             <a:r>
@@ -3681,7 +3681,7 @@
           <a:bodyPr wrap="square" lIns="0" tIns="0" rIns="0" bIns="0" rtlCol="0" anchor="ctr"/>
           <a:lstStyle/>
           <a:p>
-            <a:pPr algn="ctr" indent="0" marL="0">
+            <a:pPr eaLnBrk="0" algn="ctr" indent="0" marL="0">
               <a:buNone/>
             </a:pPr>
             <a:r>
@@ -3698,7 +3698,7 @@
             <a:endParaRPr lang="ko-KR" sz="3600" dirty="0"/>
           </a:p>
           <a:p>
-            <a:pPr algn="ctr" indent="0" marL="0">
+            <a:pPr eaLnBrk="0" algn="ctr" indent="0" marL="0">
               <a:buNone/>
             </a:pPr>
             <a:r>
@@ -3715,7 +3715,7 @@
             <a:endParaRPr lang="ko-KR" sz="3600" dirty="0"/>
           </a:p>
           <a:p>
-            <a:pPr algn="ctr" indent="0" marL="0">
+            <a:pPr eaLnBrk="0" algn="ctr" indent="0" marL="0">
               <a:buNone/>
             </a:pPr>
             <a:r>
@@ -3762,7 +3762,7 @@
           <a:bodyPr wrap="square" lIns="177800" tIns="0" rIns="177800" bIns="0" rtlCol="0" anchor="ctr"/>
           <a:lstStyle/>
           <a:p>
-            <a:pPr algn="l" indent="0" marL="0">
+            <a:pPr eaLnBrk="0" algn="l" indent="0" marL="0">
               <a:buNone/>
             </a:pPr>
             <a:r>
@@ -3801,7 +3801,7 @@
           <a:bodyPr wrap="square" lIns="0" tIns="0" rIns="0" bIns="0" rtlCol="0" anchor="ctr"/>
           <a:lstStyle/>
           <a:p>
-            <a:pPr algn="ctr" indent="0" marL="0">
+            <a:pPr eaLnBrk="0" algn="ctr" indent="0" marL="0">
               <a:buNone/>
             </a:pPr>
             <a:r>
@@ -3818,7 +3818,7 @@
             <a:endParaRPr lang="ko-KR" sz="3600" dirty="0"/>
           </a:p>
           <a:p>
-            <a:pPr algn="ctr" indent="0" marL="0">
+            <a:pPr eaLnBrk="0" algn="ctr" indent="0" marL="0">
               <a:buNone/>
             </a:pPr>
             <a:r>
@@ -3835,7 +3835,7 @@
             <a:endParaRPr lang="ko-KR" sz="3600" dirty="0"/>
           </a:p>
           <a:p>
-            <a:pPr algn="ctr" indent="0" marL="0">
+            <a:pPr eaLnBrk="0" algn="ctr" indent="0" marL="0">
               <a:buNone/>
             </a:pPr>
             <a:r>
@@ -3892,7 +3892,7 @@
             </a:lvl1pPr>
           </a:lstStyle>
           <a:p>
-            <a:pPr algn="r"/>
+            <a:pPr eaLnBrk="0" algn="r"/>
             <a:fld id="{F7021451-1387-4CA6-816F-3879F97B5CBC}" type="slidenum">
               <a:rPr b="0" lang="en-US"/>
               <a:t>10</a:t>
@@ -3949,7 +3949,7 @@
           <a:bodyPr wrap="square" lIns="0" tIns="0" rIns="0" bIns="0" rtlCol="0" anchor="ctr"/>
           <a:lstStyle/>
           <a:p>
-            <a:pPr algn="l" indent="0" marL="0">
+            <a:pPr eaLnBrk="0" algn="l" indent="0" marL="0">
               <a:buNone/>
             </a:pPr>
             <a:r>
@@ -3988,7 +3988,7 @@
           <a:bodyPr wrap="square" lIns="0" tIns="0" rIns="0" bIns="0" rtlCol="0" anchor="ctr"/>
           <a:lstStyle/>
           <a:p>
-            <a:pPr algn="l" indent="0" marL="0">
+            <a:pPr eaLnBrk="0" algn="l" indent="0" marL="0">
               <a:buNone/>
             </a:pPr>
             <a:r>
@@ -4035,7 +4035,7 @@
           <a:bodyPr wrap="square" lIns="0" tIns="0" rIns="0" bIns="0" rtlCol="0" anchor="ctr"/>
           <a:lstStyle/>
           <a:p>
-            <a:pPr algn="ctr" indent="0" marL="0">
+            <a:pPr eaLnBrk="0" algn="ctr" indent="0" marL="0">
               <a:buNone/>
             </a:pPr>
             <a:r>
@@ -4074,7 +4074,7 @@
           <a:bodyPr wrap="square" lIns="0" tIns="0" rIns="0" bIns="0" rtlCol="0" anchor="ctr"/>
           <a:lstStyle/>
           <a:p>
-            <a:pPr algn="l" indent="0" marL="0">
+            <a:pPr eaLnBrk="0" algn="l" indent="0" marL="0">
               <a:buNone/>
             </a:pPr>
             <a:r>
@@ -4121,7 +4121,7 @@
           <a:bodyPr wrap="square" lIns="0" tIns="0" rIns="0" bIns="0" rtlCol="0" anchor="ctr"/>
           <a:lstStyle/>
           <a:p>
-            <a:pPr algn="ctr" indent="0" marL="0">
+            <a:pPr eaLnBrk="0" algn="ctr" indent="0" marL="0">
               <a:buNone/>
             </a:pPr>
             <a:r>
@@ -4160,7 +4160,7 @@
           <a:bodyPr wrap="square" lIns="0" tIns="0" rIns="0" bIns="0" rtlCol="0" anchor="ctr"/>
           <a:lstStyle/>
           <a:p>
-            <a:pPr algn="l" indent="0" marL="0">
+            <a:pPr eaLnBrk="0" algn="l" indent="0" marL="0">
               <a:buNone/>
             </a:pPr>
             <a:r>
@@ -4207,7 +4207,7 @@
           <a:bodyPr wrap="square" lIns="0" tIns="0" rIns="0" bIns="0" rtlCol="0" anchor="ctr"/>
           <a:lstStyle/>
           <a:p>
-            <a:pPr algn="ctr" indent="0" marL="0">
+            <a:pPr eaLnBrk="0" algn="ctr" indent="0" marL="0">
               <a:buNone/>
             </a:pPr>
             <a:r>
@@ -4246,7 +4246,7 @@
           <a:bodyPr wrap="square" lIns="0" tIns="0" rIns="0" bIns="0" rtlCol="0" anchor="ctr"/>
           <a:lstStyle/>
           <a:p>
-            <a:pPr algn="l" indent="0" marL="0">
+            <a:pPr eaLnBrk="0" algn="l" indent="0" marL="0">
               <a:buNone/>
             </a:pPr>
             <a:r>
@@ -4303,7 +4303,7 @@
             </a:lvl1pPr>
           </a:lstStyle>
           <a:p>
-            <a:pPr algn="r"/>
+            <a:pPr eaLnBrk="0" algn="r"/>
             <a:fld id="{F7021451-1387-4CA6-816F-3879F97B5CBC}" type="slidenum">
               <a:rPr b="0" lang="en-US"/>
               <a:t>11</a:t>
@@ -4360,7 +4360,7 @@
           <a:bodyPr wrap="square" lIns="0" tIns="0" rIns="0" bIns="0" rtlCol="0" anchor="ctr"/>
           <a:lstStyle/>
           <a:p>
-            <a:pPr algn="l" indent="0" marL="0">
+            <a:pPr eaLnBrk="0" algn="l" indent="0" marL="0">
               <a:buNone/>
             </a:pPr>
             <a:r>
@@ -4426,7 +4426,7 @@
           <a:bodyPr wrap="square" lIns="0" tIns="0" rIns="0" bIns="0" rtlCol="0" anchor="ctr"/>
           <a:lstStyle/>
           <a:p>
-            <a:pPr indent="0" marL="0">
+            <a:pPr eaLnBrk="0" indent="0" marL="0">
               <a:spcAft>
                 <a:spcPts val="600"/>
               </a:spcAft>
@@ -4476,7 +4476,7 @@
           <a:bodyPr wrap="square" lIns="177800" tIns="0" rIns="177800" bIns="0" rtlCol="0" anchor="ctr"/>
           <a:lstStyle/>
           <a:p>
-            <a:pPr algn="l" indent="0" marL="0">
+            <a:pPr eaLnBrk="0" algn="l" indent="0" marL="0">
               <a:buNone/>
             </a:pPr>
             <a:r>
@@ -4515,7 +4515,7 @@
           <a:bodyPr wrap="square" lIns="0" tIns="0" rIns="0" bIns="0" rtlCol="0" anchor="ctr"/>
           <a:lstStyle/>
           <a:p>
-            <a:pPr algn="l" indent="0" marL="0">
+            <a:pPr eaLnBrk="0" algn="l" indent="0" marL="0">
               <a:buNone/>
             </a:pPr>
             <a:r>
@@ -4554,7 +4554,7 @@
           <a:bodyPr wrap="square" lIns="0" tIns="0" rIns="0" bIns="0" rtlCol="0" anchor="ctr"/>
           <a:lstStyle/>
           <a:p>
-            <a:pPr algn="l" indent="0" marL="0">
+            <a:pPr eaLnBrk="0" algn="l" indent="0" marL="0">
               <a:buNone/>
             </a:pPr>
             <a:r>
@@ -4593,7 +4593,7 @@
           <a:bodyPr wrap="square" lIns="0" tIns="0" rIns="0" bIns="0" rtlCol="0" anchor="ctr"/>
           <a:lstStyle/>
           <a:p>
-            <a:pPr algn="l" indent="0" marL="0">
+            <a:pPr eaLnBrk="0" algn="l" indent="0" marL="0">
               <a:buNone/>
             </a:pPr>
             <a:r>
@@ -4632,7 +4632,7 @@
           <a:bodyPr wrap="square" lIns="0" tIns="0" rIns="0" bIns="0" rtlCol="0" anchor="ctr"/>
           <a:lstStyle/>
           <a:p>
-            <a:pPr algn="l" indent="0" marL="0">
+            <a:pPr eaLnBrk="0" algn="l" indent="0" marL="0">
               <a:buNone/>
             </a:pPr>
             <a:r>
@@ -4671,7 +4671,7 @@
           <a:bodyPr wrap="square" lIns="0" tIns="0" rIns="0" bIns="0" rtlCol="0" anchor="ctr"/>
           <a:lstStyle/>
           <a:p>
-            <a:pPr algn="l" indent="0" marL="0">
+            <a:pPr eaLnBrk="0" algn="l" indent="0" marL="0">
               <a:buNone/>
             </a:pPr>
             <a:r>
@@ -4710,7 +4710,7 @@
           <a:bodyPr wrap="square" lIns="0" tIns="0" rIns="0" bIns="0" rtlCol="0" anchor="ctr"/>
           <a:lstStyle/>
           <a:p>
-            <a:pPr algn="l" indent="0" marL="0">
+            <a:pPr eaLnBrk="0" algn="l" indent="0" marL="0">
               <a:buNone/>
             </a:pPr>
             <a:r>
@@ -4757,7 +4757,7 @@
           <a:bodyPr wrap="square" lIns="177800" tIns="0" rIns="177800" bIns="0" rtlCol="0" anchor="ctr"/>
           <a:lstStyle/>
           <a:p>
-            <a:pPr algn="l" indent="0" marL="0">
+            <a:pPr eaLnBrk="0" algn="l" indent="0" marL="0">
               <a:buNone/>
             </a:pPr>
             <a:r>
@@ -4796,7 +4796,7 @@
           <a:bodyPr wrap="square" lIns="0" tIns="0" rIns="0" bIns="0" rtlCol="0" anchor="ctr"/>
           <a:lstStyle/>
           <a:p>
-            <a:pPr algn="l" indent="0" marL="0">
+            <a:pPr eaLnBrk="0" algn="l" indent="0" marL="0">
               <a:buNone/>
             </a:pPr>
             <a:r>
@@ -4835,7 +4835,7 @@
           <a:bodyPr wrap="square" lIns="0" tIns="0" rIns="0" bIns="0" rtlCol="0" anchor="ctr"/>
           <a:lstStyle/>
           <a:p>
-            <a:pPr algn="l" indent="0" marL="0">
+            <a:pPr eaLnBrk="0" algn="l" indent="0" marL="0">
               <a:buNone/>
             </a:pPr>
             <a:r>
@@ -4874,7 +4874,7 @@
           <a:bodyPr wrap="square" lIns="0" tIns="0" rIns="0" bIns="0" rtlCol="0" anchor="ctr"/>
           <a:lstStyle/>
           <a:p>
-            <a:pPr algn="l" indent="0" marL="0">
+            <a:pPr eaLnBrk="0" algn="l" indent="0" marL="0">
               <a:buNone/>
             </a:pPr>
             <a:r>
@@ -4913,7 +4913,7 @@
           <a:bodyPr wrap="square" lIns="0" tIns="0" rIns="0" bIns="0" rtlCol="0" anchor="ctr"/>
           <a:lstStyle/>
           <a:p>
-            <a:pPr algn="l" indent="0" marL="0">
+            <a:pPr eaLnBrk="0" algn="l" indent="0" marL="0">
               <a:buNone/>
             </a:pPr>
             <a:r>
@@ -4970,7 +4970,7 @@
             </a:lvl1pPr>
           </a:lstStyle>
           <a:p>
-            <a:pPr algn="r"/>
+            <a:pPr eaLnBrk="0" algn="r"/>
             <a:fld id="{F7021451-1387-4CA6-816F-3879F97B5CBC}" type="slidenum">
               <a:rPr b="0" lang="en-US"/>
               <a:t>12</a:t>
@@ -5027,7 +5027,7 @@
           <a:bodyPr wrap="square" lIns="0" tIns="0" rIns="0" bIns="0" rtlCol="0" anchor="ctr"/>
           <a:lstStyle/>
           <a:p>
-            <a:pPr algn="l" indent="0" marL="0">
+            <a:pPr eaLnBrk="0" algn="l" indent="0" marL="0">
               <a:buNone/>
             </a:pPr>
             <a:r>
@@ -5093,7 +5093,7 @@
           <a:bodyPr wrap="square" lIns="0" tIns="0" rIns="0" bIns="0" rtlCol="0" anchor="ctr"/>
           <a:lstStyle/>
           <a:p>
-            <a:pPr indent="0" marL="0">
+            <a:pPr eaLnBrk="0" indent="0" marL="0">
               <a:spcAft>
                 <a:spcPts val="600"/>
               </a:spcAft>
@@ -5143,7 +5143,7 @@
           <a:bodyPr wrap="square" lIns="0" tIns="0" rIns="0" bIns="0" rtlCol="0" anchor="ctr"/>
           <a:lstStyle/>
           <a:p>
-            <a:pPr algn="ctr" indent="0" marL="0">
+            <a:pPr eaLnBrk="0" algn="ctr" indent="0" marL="0">
               <a:buNone/>
             </a:pPr>
             <a:r>
@@ -5209,7 +5209,7 @@
           <a:bodyPr wrap="square" lIns="0" tIns="0" rIns="0" bIns="0" rtlCol="0" anchor="ctr"/>
           <a:lstStyle/>
           <a:p>
-            <a:pPr indent="0" marL="0">
+            <a:pPr eaLnBrk="0" indent="0" marL="0">
               <a:spcAft>
                 <a:spcPts val="600"/>
               </a:spcAft>
@@ -5259,7 +5259,7 @@
           <a:bodyPr wrap="square" lIns="0" tIns="0" rIns="0" bIns="0" rtlCol="0" anchor="ctr"/>
           <a:lstStyle/>
           <a:p>
-            <a:pPr algn="ctr" indent="0" marL="0">
+            <a:pPr eaLnBrk="0" algn="ctr" indent="0" marL="0">
               <a:buNone/>
             </a:pPr>
             <a:r>
@@ -5325,7 +5325,7 @@
           <a:bodyPr wrap="square" lIns="0" tIns="0" rIns="0" bIns="0" rtlCol="0" anchor="ctr"/>
           <a:lstStyle/>
           <a:p>
-            <a:pPr indent="0" marL="0">
+            <a:pPr eaLnBrk="0" indent="0" marL="0">
               <a:spcAft>
                 <a:spcPts val="600"/>
               </a:spcAft>
@@ -5375,7 +5375,7 @@
           <a:bodyPr wrap="square" lIns="0" tIns="0" rIns="0" bIns="0" rtlCol="0" anchor="ctr"/>
           <a:lstStyle/>
           <a:p>
-            <a:pPr algn="ctr" indent="0" marL="0">
+            <a:pPr eaLnBrk="0" algn="ctr" indent="0" marL="0">
               <a:buNone/>
             </a:pPr>
             <a:r>
@@ -5441,7 +5441,7 @@
           <a:bodyPr wrap="square" lIns="0" tIns="0" rIns="0" bIns="0" rtlCol="0" anchor="ctr"/>
           <a:lstStyle/>
           <a:p>
-            <a:pPr indent="0" marL="0">
+            <a:pPr eaLnBrk="0" indent="0" marL="0">
               <a:spcAft>
                 <a:spcPts val="600"/>
               </a:spcAft>
@@ -5501,7 +5501,7 @@
             </a:lvl1pPr>
           </a:lstStyle>
           <a:p>
-            <a:pPr algn="r"/>
+            <a:pPr eaLnBrk="0" algn="r"/>
             <a:fld id="{F7021451-1387-4CA6-816F-3879F97B5CBC}" type="slidenum">
               <a:rPr b="0" lang="en-US"/>
               <a:t>13</a:t>
@@ -5558,7 +5558,7 @@
           <a:bodyPr wrap="square" lIns="0" tIns="0" rIns="0" bIns="0" rtlCol="0" anchor="ctr"/>
           <a:lstStyle/>
           <a:p>
-            <a:pPr algn="l" indent="0" marL="0">
+            <a:pPr eaLnBrk="0" algn="l" indent="0" marL="0">
               <a:buNone/>
             </a:pPr>
             <a:r>
@@ -5624,7 +5624,7 @@
           <a:bodyPr wrap="square" lIns="0" tIns="0" rIns="0" bIns="0" rtlCol="0" anchor="ctr"/>
           <a:lstStyle/>
           <a:p>
-            <a:pPr indent="0" marL="0">
+            <a:pPr eaLnBrk="0" indent="0" marL="0">
               <a:spcAft>
                 <a:spcPts val="600"/>
               </a:spcAft>
@@ -5674,7 +5674,7 @@
           <a:bodyPr wrap="square" lIns="177800" tIns="0" rIns="177800" bIns="0" rtlCol="0" anchor="ctr"/>
           <a:lstStyle/>
           <a:p>
-            <a:pPr algn="l" indent="0" marL="0">
+            <a:pPr eaLnBrk="0" algn="l" indent="0" marL="0">
               <a:buNone/>
             </a:pPr>
             <a:r>
@@ -5721,7 +5721,7 @@
           <a:bodyPr wrap="square" lIns="177800" tIns="0" rIns="177800" bIns="0" rtlCol="0" anchor="ctr"/>
           <a:lstStyle/>
           <a:p>
-            <a:pPr algn="l" indent="0" marL="0">
+            <a:pPr eaLnBrk="0" algn="l" indent="0" marL="0">
               <a:buNone/>
             </a:pPr>
             <a:r>
@@ -5760,7 +5760,7 @@
           <a:bodyPr wrap="square" lIns="0" tIns="0" rIns="0" bIns="0" rtlCol="0" anchor="t"/>
           <a:lstStyle/>
           <a:p>
-            <a:pPr algn="l" indent="0" marL="0">
+            <a:pPr eaLnBrk="0" algn="l" indent="0" marL="0">
               <a:buNone/>
             </a:pPr>
             <a:r>
@@ -5799,7 +5799,7 @@
           <a:bodyPr wrap="square" lIns="0" tIns="0" rIns="0" bIns="0" rtlCol="0" anchor="ctr"/>
           <a:lstStyle/>
           <a:p>
-            <a:pPr algn="l" indent="0" marL="0">
+            <a:pPr eaLnBrk="0" algn="l" indent="0" marL="0">
               <a:buNone/>
             </a:pPr>
             <a:r>
@@ -5838,7 +5838,7 @@
           <a:bodyPr wrap="square" lIns="0" tIns="0" rIns="0" bIns="0" rtlCol="0" anchor="ctr"/>
           <a:lstStyle/>
           <a:p>
-            <a:pPr algn="l" indent="0" marL="0">
+            <a:pPr eaLnBrk="0" algn="l" indent="0" marL="0">
               <a:buNone/>
             </a:pPr>
             <a:r>
@@ -5877,7 +5877,7 @@
           <a:bodyPr wrap="square" lIns="0" tIns="0" rIns="0" bIns="0" rtlCol="0" anchor="ctr"/>
           <a:lstStyle/>
           <a:p>
-            <a:pPr algn="l" indent="0" marL="0">
+            <a:pPr eaLnBrk="0" algn="l" indent="0" marL="0">
               <a:buNone/>
             </a:pPr>
             <a:r>
@@ -5916,7 +5916,7 @@
           <a:bodyPr wrap="square" lIns="0" tIns="0" rIns="0" bIns="0" rtlCol="0" anchor="ctr"/>
           <a:lstStyle/>
           <a:p>
-            <a:pPr algn="l" indent="0" marL="0">
+            <a:pPr eaLnBrk="0" algn="l" indent="0" marL="0">
               <a:buNone/>
             </a:pPr>
             <a:r>
@@ -5973,7 +5973,7 @@
             </a:lvl1pPr>
           </a:lstStyle>
           <a:p>
-            <a:pPr algn="r"/>
+            <a:pPr eaLnBrk="0" algn="r"/>
             <a:fld id="{F7021451-1387-4CA6-816F-3879F97B5CBC}" type="slidenum">
               <a:rPr b="0" lang="en-US"/>
               <a:t>14</a:t>
@@ -6030,7 +6030,7 @@
           <a:bodyPr wrap="square" lIns="0" tIns="0" rIns="0" bIns="0" rtlCol="0" anchor="ctr"/>
           <a:lstStyle/>
           <a:p>
-            <a:pPr algn="l" indent="0" marL="0">
+            <a:pPr eaLnBrk="0" algn="l" indent="0" marL="0">
               <a:buNone/>
             </a:pPr>
             <a:r>
@@ -6069,7 +6069,7 @@
           <a:bodyPr wrap="square" lIns="0" tIns="0" rIns="0" bIns="0" rtlCol="0" anchor="ctr"/>
           <a:lstStyle/>
           <a:p>
-            <a:pPr algn="l" indent="0" marL="0">
+            <a:pPr eaLnBrk="0" algn="l" indent="0" marL="0">
               <a:buNone/>
             </a:pPr>
             <a:r>
@@ -6135,7 +6135,7 @@
           <a:bodyPr wrap="square" lIns="0" tIns="0" rIns="0" bIns="0" rtlCol="0" anchor="ctr"/>
           <a:lstStyle/>
           <a:p>
-            <a:pPr indent="0" marL="0">
+            <a:pPr eaLnBrk="0" indent="0" marL="0">
               <a:spcAft>
                 <a:spcPts val="600"/>
               </a:spcAft>
@@ -6225,7 +6225,7 @@
           <a:bodyPr wrap="square" lIns="0" tIns="0" rIns="0" bIns="0" rtlCol="0" anchor="ctr"/>
           <a:lstStyle/>
           <a:p>
-            <a:pPr algn="ctr" indent="0" marL="0">
+            <a:pPr eaLnBrk="0" algn="ctr" indent="0" marL="0">
               <a:buNone/>
             </a:pPr>
             <a:r>
@@ -6287,7 +6287,7 @@
           <a:bodyPr wrap="square" lIns="0" tIns="0" rIns="0" bIns="0" rtlCol="0" anchor="ctr"/>
           <a:lstStyle/>
           <a:p>
-            <a:pPr algn="ctr" indent="0" marL="0">
+            <a:pPr eaLnBrk="0" algn="ctr" indent="0" marL="0">
               <a:buNone/>
             </a:pPr>
             <a:r>
@@ -6349,7 +6349,7 @@
           <a:bodyPr wrap="square" lIns="0" tIns="0" rIns="0" bIns="0" rtlCol="0" anchor="ctr"/>
           <a:lstStyle/>
           <a:p>
-            <a:pPr algn="ctr" indent="0" marL="0">
+            <a:pPr eaLnBrk="0" algn="ctr" indent="0" marL="0">
               <a:buNone/>
             </a:pPr>
             <a:r>
@@ -6411,7 +6411,7 @@
           <a:bodyPr wrap="square" lIns="0" tIns="0" rIns="0" bIns="0" rtlCol="0" anchor="ctr"/>
           <a:lstStyle/>
           <a:p>
-            <a:pPr algn="ctr" indent="0" marL="0">
+            <a:pPr eaLnBrk="0" algn="ctr" indent="0" marL="0">
               <a:buNone/>
             </a:pPr>
             <a:r>
@@ -6473,7 +6473,7 @@
           <a:bodyPr wrap="square" lIns="0" tIns="0" rIns="0" bIns="0" rtlCol="0" anchor="ctr"/>
           <a:lstStyle/>
           <a:p>
-            <a:pPr algn="ctr" indent="0" marL="0">
+            <a:pPr eaLnBrk="0" algn="ctr" indent="0" marL="0">
               <a:buNone/>
             </a:pPr>
             <a:r>
@@ -6535,7 +6535,7 @@
           <a:bodyPr wrap="square" lIns="0" tIns="0" rIns="0" bIns="0" rtlCol="0" anchor="ctr"/>
           <a:lstStyle/>
           <a:p>
-            <a:pPr algn="ctr" indent="0" marL="0">
+            <a:pPr eaLnBrk="0" algn="ctr" indent="0" marL="0">
               <a:buNone/>
             </a:pPr>
             <a:r>
@@ -6597,7 +6597,7 @@
           <a:bodyPr wrap="square" lIns="0" tIns="0" rIns="0" bIns="0" rtlCol="0" anchor="ctr"/>
           <a:lstStyle/>
           <a:p>
-            <a:pPr algn="ctr" indent="0" marL="0">
+            <a:pPr eaLnBrk="0" algn="ctr" indent="0" marL="0">
               <a:buNone/>
             </a:pPr>
             <a:r>
@@ -6659,7 +6659,7 @@
           <a:bodyPr wrap="square" lIns="0" tIns="0" rIns="0" bIns="0" rtlCol="0" anchor="ctr"/>
           <a:lstStyle/>
           <a:p>
-            <a:pPr algn="ctr" indent="0" marL="0">
+            <a:pPr eaLnBrk="0" algn="ctr" indent="0" marL="0">
               <a:buNone/>
             </a:pPr>
             <a:r>
@@ -6721,7 +6721,7 @@
           <a:bodyPr wrap="square" lIns="0" tIns="0" rIns="0" bIns="0" rtlCol="0" anchor="ctr"/>
           <a:lstStyle/>
           <a:p>
-            <a:pPr algn="ctr" indent="0" marL="0">
+            <a:pPr eaLnBrk="0" algn="ctr" indent="0" marL="0">
               <a:buNone/>
             </a:pPr>
             <a:r>
@@ -6783,7 +6783,7 @@
           <a:bodyPr wrap="square" lIns="0" tIns="0" rIns="0" bIns="0" rtlCol="0" anchor="ctr"/>
           <a:lstStyle/>
           <a:p>
-            <a:pPr algn="ctr" indent="0" marL="0">
+            <a:pPr eaLnBrk="0" algn="ctr" indent="0" marL="0">
               <a:buNone/>
             </a:pPr>
             <a:r>
@@ -6869,7 +6869,7 @@
           <a:bodyPr wrap="square" lIns="0" tIns="0" rIns="0" bIns="0" rtlCol="0" anchor="ctr"/>
           <a:lstStyle/>
           <a:p>
-            <a:pPr algn="ctr" indent="0" marL="0">
+            <a:pPr eaLnBrk="0" algn="ctr" indent="0" marL="0">
               <a:buNone/>
             </a:pPr>
             <a:r>
@@ -6955,7 +6955,7 @@
           <a:bodyPr wrap="square" lIns="0" tIns="0" rIns="0" bIns="0" rtlCol="0" anchor="ctr"/>
           <a:lstStyle/>
           <a:p>
-            <a:pPr algn="ctr" indent="0" marL="0">
+            <a:pPr eaLnBrk="0" algn="ctr" indent="0" marL="0">
               <a:buNone/>
             </a:pPr>
             <a:r>
@@ -7041,7 +7041,7 @@
           <a:bodyPr wrap="square" lIns="0" tIns="0" rIns="0" bIns="0" rtlCol="0" anchor="ctr"/>
           <a:lstStyle/>
           <a:p>
-            <a:pPr algn="ctr" indent="0" marL="0">
+            <a:pPr eaLnBrk="0" algn="ctr" indent="0" marL="0">
               <a:buNone/>
             </a:pPr>
             <a:r>
@@ -7127,7 +7127,7 @@
             </a:lvl1pPr>
           </a:lstStyle>
           <a:p>
-            <a:pPr algn="r"/>
+            <a:pPr eaLnBrk="0" algn="r"/>
             <a:fld id="{F7021451-1387-4CA6-816F-3879F97B5CBC}" type="slidenum">
               <a:rPr b="0" lang="en-US"/>
               <a:t>15</a:t>
@@ -7184,7 +7184,7 @@
           <a:bodyPr wrap="square" lIns="0" tIns="0" rIns="0" bIns="0" rtlCol="0" anchor="ctr"/>
           <a:lstStyle/>
           <a:p>
-            <a:pPr algn="l" indent="0" marL="0">
+            <a:pPr eaLnBrk="0" algn="l" indent="0" marL="0">
               <a:buNone/>
             </a:pPr>
             <a:r>
@@ -7231,7 +7231,7 @@
           <a:bodyPr wrap="square" lIns="0" tIns="0" rIns="0" bIns="0" rtlCol="0" anchor="ctr"/>
           <a:lstStyle/>
           <a:p>
-            <a:pPr algn="ctr" indent="0" marL="0">
+            <a:pPr eaLnBrk="0" algn="ctr" indent="0" marL="0">
               <a:buNone/>
             </a:pPr>
             <a:r>
@@ -7701,7 +7701,7 @@
       </p:sp>
       <p:sp>
         <p:nvSpPr>
-          <p:cNvPr id="22" name="S02-figure29" descr="십 칸 틀에 8개"/>
+          <p:cNvPr id="22" name="S02-figure29" descr="1개의 십 칸 틀 중 1번째: 모두 8개"/>
           <p:cNvSpPr/>
           <p:nvPr/>
         </p:nvSpPr>
@@ -7755,7 +7755,7 @@
           <a:bodyPr wrap="square" lIns="0" tIns="0" rIns="0" bIns="0" rtlCol="0" anchor="ctr"/>
           <a:lstStyle/>
           <a:p>
-            <a:pPr algn="ctr" indent="0" marL="0">
+            <a:pPr eaLnBrk="0" algn="ctr" indent="0" marL="0">
               <a:buNone/>
             </a:pPr>
             <a:r>
@@ -7794,7 +7794,7 @@
           <a:bodyPr wrap="square" lIns="0" tIns="0" rIns="0" bIns="0" rtlCol="0" anchor="ctr"/>
           <a:lstStyle/>
           <a:p>
-            <a:pPr algn="l" indent="0" marL="0">
+            <a:pPr eaLnBrk="0" algn="l" indent="0" marL="0">
               <a:buNone/>
             </a:pPr>
             <a:r>
@@ -7841,7 +7841,7 @@
           <a:bodyPr wrap="square" lIns="0" tIns="0" rIns="0" bIns="0" rtlCol="0" anchor="ctr"/>
           <a:lstStyle/>
           <a:p>
-            <a:pPr algn="ctr" indent="0" marL="0">
+            <a:pPr eaLnBrk="0" algn="ctr" indent="0" marL="0">
               <a:buNone/>
             </a:pPr>
             <a:r>
@@ -7880,7 +7880,7 @@
           <a:bodyPr wrap="square" lIns="0" tIns="0" rIns="0" bIns="0" rtlCol="0" anchor="ctr"/>
           <a:lstStyle/>
           <a:p>
-            <a:pPr algn="l" indent="0" marL="0">
+            <a:pPr eaLnBrk="0" algn="l" indent="0" marL="0">
               <a:buNone/>
             </a:pPr>
             <a:r>
@@ -7937,7 +7937,7 @@
             </a:lvl1pPr>
           </a:lstStyle>
           <a:p>
-            <a:pPr algn="r"/>
+            <a:pPr eaLnBrk="0" algn="r"/>
             <a:fld id="{F7021451-1387-4CA6-816F-3879F97B5CBC}" type="slidenum">
               <a:rPr b="0" lang="en-US"/>
               <a:t>2</a:t>
@@ -7994,7 +7994,7 @@
           <a:bodyPr wrap="square" lIns="0" tIns="0" rIns="0" bIns="0" rtlCol="0" anchor="ctr"/>
           <a:lstStyle/>
           <a:p>
-            <a:pPr algn="l" indent="0" marL="0">
+            <a:pPr eaLnBrk="0" algn="l" indent="0" marL="0">
               <a:buNone/>
             </a:pPr>
             <a:r>
@@ -8033,7 +8033,7 @@
           <a:bodyPr wrap="square" lIns="0" tIns="0" rIns="0" bIns="0" rtlCol="0" anchor="ctr"/>
           <a:lstStyle/>
           <a:p>
-            <a:pPr algn="l" indent="0" marL="0">
+            <a:pPr eaLnBrk="0" algn="l" indent="0" marL="0">
               <a:buNone/>
             </a:pPr>
             <a:r>
@@ -8099,7 +8099,7 @@
           <a:bodyPr wrap="square" lIns="0" tIns="0" rIns="0" bIns="0" rtlCol="0" anchor="ctr"/>
           <a:lstStyle/>
           <a:p>
-            <a:pPr indent="0" marL="0">
+            <a:pPr eaLnBrk="0" indent="0" marL="0">
               <a:spcAft>
                 <a:spcPts val="600"/>
               </a:spcAft>
@@ -8220,7 +8220,7 @@
           <a:bodyPr wrap="square" lIns="0" tIns="0" rIns="0" bIns="0" rtlCol="0" anchor="ctr"/>
           <a:lstStyle/>
           <a:p>
-            <a:pPr algn="ctr" indent="0" marL="0">
+            <a:pPr eaLnBrk="0" algn="ctr" indent="0" marL="0">
               <a:buNone/>
             </a:pPr>
             <a:r>
@@ -8363,7 +8363,7 @@
           <a:bodyPr wrap="square" lIns="0" tIns="0" rIns="0" bIns="0" rtlCol="0" anchor="ctr"/>
           <a:lstStyle/>
           <a:p>
-            <a:pPr algn="ctr" indent="0" marL="0">
+            <a:pPr eaLnBrk="0" algn="ctr" indent="0" marL="0">
               <a:buNone/>
             </a:pPr>
             <a:r>
@@ -8420,7 +8420,7 @@
             </a:lvl1pPr>
           </a:lstStyle>
           <a:p>
-            <a:pPr algn="r"/>
+            <a:pPr eaLnBrk="0" algn="r"/>
             <a:fld id="{F7021451-1387-4CA6-816F-3879F97B5CBC}" type="slidenum">
               <a:rPr b="0" lang="en-US"/>
               <a:t>3</a:t>
@@ -8477,7 +8477,7 @@
           <a:bodyPr wrap="square" lIns="0" tIns="0" rIns="0" bIns="0" rtlCol="0" anchor="ctr"/>
           <a:lstStyle/>
           <a:p>
-            <a:pPr algn="l" indent="0" marL="0">
+            <a:pPr eaLnBrk="0" algn="l" indent="0" marL="0">
               <a:buNone/>
             </a:pPr>
             <a:r>
@@ -8516,7 +8516,7 @@
           <a:bodyPr wrap="square" lIns="0" tIns="0" rIns="0" bIns="0" rtlCol="0" anchor="ctr"/>
           <a:lstStyle/>
           <a:p>
-            <a:pPr algn="l" indent="0" marL="0">
+            <a:pPr eaLnBrk="0" algn="l" indent="0" marL="0">
               <a:buNone/>
             </a:pPr>
             <a:r>
@@ -8582,7 +8582,7 @@
           <a:bodyPr wrap="square" lIns="0" tIns="0" rIns="0" bIns="0" rtlCol="0" anchor="ctr"/>
           <a:lstStyle/>
           <a:p>
-            <a:pPr indent="0" marL="0">
+            <a:pPr eaLnBrk="0" indent="0" marL="0">
               <a:spcAft>
                 <a:spcPts val="600"/>
               </a:spcAft>
@@ -8638,7 +8638,7 @@
                     <a:bodyPr/>
                     <a:lstStyle/>
                     <a:p>
-                      <a:pPr algn="ctr" indent="0" marL="0">
+                      <a:pPr eaLnBrk="0" algn="ctr" indent="0" marL="0">
                         <a:buNone/>
                       </a:pPr>
                       <a:r>
@@ -8706,7 +8706,7 @@
                     <a:bodyPr/>
                     <a:lstStyle/>
                     <a:p>
-                      <a:pPr algn="ctr" indent="0" marL="0">
+                      <a:pPr eaLnBrk="0" algn="ctr" indent="0" marL="0">
                         <a:buNone/>
                       </a:pPr>
                       <a:r>
@@ -8774,7 +8774,7 @@
                     <a:bodyPr/>
                     <a:lstStyle/>
                     <a:p>
-                      <a:pPr algn="ctr" indent="0" marL="0">
+                      <a:pPr eaLnBrk="0" algn="ctr" indent="0" marL="0">
                         <a:buNone/>
                       </a:pPr>
                       <a:r>
@@ -8842,7 +8842,7 @@
                     <a:bodyPr/>
                     <a:lstStyle/>
                     <a:p>
-                      <a:pPr algn="ctr" indent="0" marL="0">
+                      <a:pPr eaLnBrk="0" algn="ctr" indent="0" marL="0">
                         <a:buNone/>
                       </a:pPr>
                       <a:r>
@@ -8910,7 +8910,7 @@
                     <a:bodyPr/>
                     <a:lstStyle/>
                     <a:p>
-                      <a:pPr algn="ctr" indent="0" marL="0">
+                      <a:pPr eaLnBrk="0" algn="ctr" indent="0" marL="0">
                         <a:buNone/>
                       </a:pPr>
                       <a:r>
@@ -8980,7 +8980,7 @@
                     <a:bodyPr/>
                     <a:lstStyle/>
                     <a:p>
-                      <a:pPr algn="ctr" indent="0" marL="0">
+                      <a:pPr eaLnBrk="0" algn="ctr" indent="0" marL="0">
                         <a:buNone/>
                       </a:pPr>
                       <a:r>
@@ -9048,7 +9048,7 @@
                     <a:bodyPr/>
                     <a:lstStyle/>
                     <a:p>
-                      <a:pPr algn="ctr" indent="0" marL="0">
+                      <a:pPr eaLnBrk="0" algn="ctr" indent="0" marL="0">
                         <a:buNone/>
                       </a:pPr>
                       <a:r>
@@ -9116,7 +9116,7 @@
                     <a:bodyPr/>
                     <a:lstStyle/>
                     <a:p>
-                      <a:pPr algn="ctr" indent="0" marL="0">
+                      <a:pPr eaLnBrk="0" algn="ctr" indent="0" marL="0">
                         <a:buNone/>
                       </a:pPr>
                       <a:r>
@@ -9184,7 +9184,7 @@
                     <a:bodyPr/>
                     <a:lstStyle/>
                     <a:p>
-                      <a:pPr algn="ctr" indent="0" marL="0">
+                      <a:pPr eaLnBrk="0" algn="ctr" indent="0" marL="0">
                         <a:buNone/>
                       </a:pPr>
                       <a:r>
@@ -9252,7 +9252,7 @@
                     <a:bodyPr/>
                     <a:lstStyle/>
                     <a:p>
-                      <a:pPr algn="ctr" indent="0" marL="0">
+                      <a:pPr eaLnBrk="0" algn="ctr" indent="0" marL="0">
                         <a:buNone/>
                       </a:pPr>
                       <a:r>
@@ -9322,7 +9322,7 @@
                     <a:bodyPr/>
                     <a:lstStyle/>
                     <a:p>
-                      <a:pPr algn="ctr" indent="0" marL="0">
+                      <a:pPr eaLnBrk="0" algn="ctr" indent="0" marL="0">
                         <a:buNone/>
                       </a:pPr>
                       <a:r>
@@ -9390,7 +9390,7 @@
                     <a:bodyPr/>
                     <a:lstStyle/>
                     <a:p>
-                      <a:pPr algn="ctr" indent="0" marL="0">
+                      <a:pPr eaLnBrk="0" algn="ctr" indent="0" marL="0">
                         <a:buNone/>
                       </a:pPr>
                       <a:r>
@@ -9458,7 +9458,7 @@
                     <a:bodyPr/>
                     <a:lstStyle/>
                     <a:p>
-                      <a:pPr algn="ctr" indent="0" marL="0">
+                      <a:pPr eaLnBrk="0" algn="ctr" indent="0" marL="0">
                         <a:buNone/>
                       </a:pPr>
                       <a:r>
@@ -9526,7 +9526,7 @@
                     <a:bodyPr/>
                     <a:lstStyle/>
                     <a:p>
-                      <a:pPr algn="ctr" indent="0" marL="0">
+                      <a:pPr eaLnBrk="0" algn="ctr" indent="0" marL="0">
                         <a:buNone/>
                       </a:pPr>
                       <a:r>
@@ -9594,7 +9594,7 @@
                     <a:bodyPr/>
                     <a:lstStyle/>
                     <a:p>
-                      <a:pPr algn="ctr" indent="0" marL="0">
+                      <a:pPr eaLnBrk="0" algn="ctr" indent="0" marL="0">
                         <a:buNone/>
                       </a:pPr>
                       <a:r>
@@ -9701,7 +9701,7 @@
             </a:lvl1pPr>
           </a:lstStyle>
           <a:p>
-            <a:pPr algn="r"/>
+            <a:pPr eaLnBrk="0" algn="r"/>
             <a:fld id="{F7021451-1387-4CA6-816F-3879F97B5CBC}" type="slidenum">
               <a:rPr b="0" lang="en-US"/>
               <a:t>4</a:t>
@@ -9758,7 +9758,7 @@
           <a:bodyPr wrap="square" lIns="0" tIns="0" rIns="0" bIns="0" rtlCol="0" anchor="ctr"/>
           <a:lstStyle/>
           <a:p>
-            <a:pPr algn="l" indent="0" marL="0">
+            <a:pPr eaLnBrk="0" algn="l" indent="0" marL="0">
               <a:buNone/>
             </a:pPr>
             <a:r>
@@ -9797,7 +9797,7 @@
           <a:bodyPr wrap="square" lIns="0" tIns="0" rIns="0" bIns="0" rtlCol="0" anchor="ctr"/>
           <a:lstStyle/>
           <a:p>
-            <a:pPr algn="l" indent="0" marL="0">
+            <a:pPr eaLnBrk="0" algn="l" indent="0" marL="0">
               <a:buNone/>
             </a:pPr>
             <a:r>
@@ -9863,7 +9863,7 @@
           <a:bodyPr wrap="square" lIns="0" tIns="0" rIns="0" bIns="0" rtlCol="0" anchor="ctr"/>
           <a:lstStyle/>
           <a:p>
-            <a:pPr indent="0" marL="0">
+            <a:pPr eaLnBrk="0" indent="0" marL="0">
               <a:spcAft>
                 <a:spcPts val="600"/>
               </a:spcAft>
@@ -10009,7 +10009,7 @@
           <a:bodyPr wrap="square" lIns="0" tIns="0" rIns="0" bIns="0" rtlCol="0" anchor="ctr"/>
           <a:lstStyle/>
           <a:p>
-            <a:pPr algn="ctr" indent="0" marL="0">
+            <a:pPr eaLnBrk="0" algn="ctr" indent="0" marL="0">
               <a:buNone/>
             </a:pPr>
             <a:r>
@@ -10177,7 +10177,7 @@
           <a:bodyPr wrap="square" lIns="0" tIns="0" rIns="0" bIns="0" rtlCol="0" anchor="ctr"/>
           <a:lstStyle/>
           <a:p>
-            <a:pPr algn="ctr" indent="0" marL="0">
+            <a:pPr eaLnBrk="0" algn="ctr" indent="0" marL="0">
               <a:buNone/>
             </a:pPr>
             <a:r>
@@ -10234,7 +10234,7 @@
             </a:lvl1pPr>
           </a:lstStyle>
           <a:p>
-            <a:pPr algn="r"/>
+            <a:pPr eaLnBrk="0" algn="r"/>
             <a:fld id="{F7021451-1387-4CA6-816F-3879F97B5CBC}" type="slidenum">
               <a:rPr b="0" lang="en-US"/>
               <a:t>5</a:t>
@@ -10291,7 +10291,7 @@
           <a:bodyPr wrap="square" lIns="0" tIns="0" rIns="0" bIns="0" rtlCol="0" anchor="ctr"/>
           <a:lstStyle/>
           <a:p>
-            <a:pPr algn="l" indent="0" marL="0">
+            <a:pPr eaLnBrk="0" algn="l" indent="0" marL="0">
               <a:buNone/>
             </a:pPr>
             <a:r>
@@ -10357,7 +10357,7 @@
           <a:bodyPr wrap="square" lIns="0" tIns="0" rIns="0" bIns="0" rtlCol="0" anchor="ctr"/>
           <a:lstStyle/>
           <a:p>
-            <a:pPr indent="0" marL="0">
+            <a:pPr eaLnBrk="0" indent="0" marL="0">
               <a:spcAft>
                 <a:spcPts val="600"/>
               </a:spcAft>
@@ -10399,7 +10399,7 @@
           <a:bodyPr wrap="square" lIns="0" tIns="0" rIns="0" bIns="0" rtlCol="0" anchor="ctr"/>
           <a:lstStyle/>
           <a:p>
-            <a:pPr algn="ctr" indent="0" marL="0">
+            <a:pPr eaLnBrk="0" algn="ctr" indent="0" marL="0">
               <a:buNone/>
             </a:pPr>
             <a:r>
@@ -10416,7 +10416,7 @@
             <a:endParaRPr lang="ko-KR" sz="3600" dirty="0"/>
           </a:p>
           <a:p>
-            <a:pPr algn="ctr" indent="0" marL="0">
+            <a:pPr eaLnBrk="0" algn="ctr" indent="0" marL="0">
               <a:buNone/>
             </a:pPr>
             <a:r>
@@ -10433,7 +10433,7 @@
             <a:endParaRPr lang="ko-KR" sz="3600" dirty="0"/>
           </a:p>
           <a:p>
-            <a:pPr algn="ctr" indent="0" marL="0">
+            <a:pPr eaLnBrk="0" algn="ctr" indent="0" marL="0">
               <a:buNone/>
             </a:pPr>
             <a:r>
@@ -10472,7 +10472,7 @@
           <a:bodyPr wrap="square" lIns="0" tIns="0" rIns="0" bIns="0" rtlCol="0" anchor="ctr"/>
           <a:lstStyle/>
           <a:p>
-            <a:pPr algn="ctr" indent="0" marL="0">
+            <a:pPr eaLnBrk="0" algn="ctr" indent="0" marL="0">
               <a:buNone/>
             </a:pPr>
             <a:r>
@@ -10511,7 +10511,7 @@
           <a:bodyPr wrap="square" lIns="0" tIns="0" rIns="0" bIns="0" rtlCol="0" anchor="ctr"/>
           <a:lstStyle/>
           <a:p>
-            <a:pPr algn="ctr" indent="0" marL="0">
+            <a:pPr eaLnBrk="0" algn="ctr" indent="0" marL="0">
               <a:buNone/>
             </a:pPr>
             <a:r>
@@ -10528,7 +10528,7 @@
             <a:endParaRPr lang="ko-KR" sz="3600" dirty="0"/>
           </a:p>
           <a:p>
-            <a:pPr algn="ctr" indent="0" marL="0">
+            <a:pPr eaLnBrk="0" algn="ctr" indent="0" marL="0">
               <a:buNone/>
             </a:pPr>
             <a:r>
@@ -10545,7 +10545,7 @@
             <a:endParaRPr lang="ko-KR" sz="3600" dirty="0"/>
           </a:p>
           <a:p>
-            <a:pPr algn="ctr" indent="0" marL="0">
+            <a:pPr eaLnBrk="0" algn="ctr" indent="0" marL="0">
               <a:buNone/>
             </a:pPr>
             <a:r>
@@ -10584,7 +10584,7 @@
           <a:bodyPr wrap="square" lIns="0" tIns="0" rIns="0" bIns="0" rtlCol="0" anchor="ctr"/>
           <a:lstStyle/>
           <a:p>
-            <a:pPr algn="ctr" indent="0" marL="0">
+            <a:pPr eaLnBrk="0" algn="ctr" indent="0" marL="0">
               <a:buNone/>
             </a:pPr>
             <a:r>
@@ -10641,7 +10641,7 @@
             </a:lvl1pPr>
           </a:lstStyle>
           <a:p>
-            <a:pPr algn="r"/>
+            <a:pPr eaLnBrk="0" algn="r"/>
             <a:fld id="{F7021451-1387-4CA6-816F-3879F97B5CBC}" type="slidenum">
               <a:rPr b="0" lang="en-US"/>
               <a:t>6</a:t>
@@ -10698,7 +10698,7 @@
           <a:bodyPr wrap="square" lIns="0" tIns="0" rIns="0" bIns="0" rtlCol="0" anchor="ctr"/>
           <a:lstStyle/>
           <a:p>
-            <a:pPr algn="l" indent="0" marL="0">
+            <a:pPr eaLnBrk="0" algn="l" indent="0" marL="0">
               <a:buNone/>
             </a:pPr>
             <a:r>
@@ -10764,7 +10764,7 @@
           <a:bodyPr wrap="square" lIns="0" tIns="0" rIns="0" bIns="0" rtlCol="0" anchor="ctr"/>
           <a:lstStyle/>
           <a:p>
-            <a:pPr indent="0" marL="0">
+            <a:pPr eaLnBrk="0" indent="0" marL="0">
               <a:spcAft>
                 <a:spcPts val="600"/>
               </a:spcAft>
@@ -10833,7 +10833,7 @@
           <a:bodyPr wrap="square" lIns="0" tIns="0" rIns="0" bIns="0" rtlCol="0" anchor="ctr"/>
           <a:lstStyle/>
           <a:p>
-            <a:pPr indent="0" marL="0">
+            <a:pPr eaLnBrk="0" indent="0" marL="0">
               <a:spcAft>
                 <a:spcPts val="600"/>
               </a:spcAft>
@@ -10902,7 +10902,7 @@
           <a:bodyPr wrap="square" lIns="0" tIns="0" rIns="0" bIns="0" rtlCol="0" anchor="ctr"/>
           <a:lstStyle/>
           <a:p>
-            <a:pPr indent="0" marL="0">
+            <a:pPr eaLnBrk="0" indent="0" marL="0">
               <a:spcAft>
                 <a:spcPts val="600"/>
               </a:spcAft>
@@ -11425,7 +11425,7 @@
       </p:sp>
       <p:sp>
         <p:nvSpPr>
-          <p:cNvPr id="29" name="S07-figure96" descr="십 칸 틀에 10개"/>
+          <p:cNvPr id="29" name="S07-figure96" descr="1개의 십 칸 틀 중 1번째: 모두 10개"/>
           <p:cNvSpPr/>
           <p:nvPr/>
         </p:nvSpPr>
@@ -11489,7 +11489,7 @@
             </a:lvl1pPr>
           </a:lstStyle>
           <a:p>
-            <a:pPr algn="r"/>
+            <a:pPr eaLnBrk="0" algn="r"/>
             <a:fld id="{F7021451-1387-4CA6-816F-3879F97B5CBC}" type="slidenum">
               <a:rPr b="0" lang="en-US"/>
               <a:t>7</a:t>
@@ -11546,7 +11546,7 @@
           <a:bodyPr wrap="square" lIns="0" tIns="0" rIns="0" bIns="0" rtlCol="0" anchor="ctr"/>
           <a:lstStyle/>
           <a:p>
-            <a:pPr algn="l" indent="0" marL="0">
+            <a:pPr eaLnBrk="0" algn="l" indent="0" marL="0">
               <a:buNone/>
             </a:pPr>
             <a:r>
@@ -11612,7 +11612,7 @@
           <a:bodyPr wrap="square" lIns="0" tIns="0" rIns="0" bIns="0" rtlCol="0" anchor="ctr"/>
           <a:lstStyle/>
           <a:p>
-            <a:pPr indent="0" marL="0">
+            <a:pPr eaLnBrk="0" indent="0" marL="0">
               <a:spcAft>
                 <a:spcPts val="600"/>
               </a:spcAft>
@@ -11662,7 +11662,7 @@
           <a:bodyPr wrap="square" lIns="0" tIns="0" rIns="0" bIns="0" rtlCol="0" anchor="ctr"/>
           <a:lstStyle/>
           <a:p>
-            <a:pPr algn="ctr" indent="0" marL="0">
+            <a:pPr eaLnBrk="0" algn="ctr" indent="0" marL="0">
               <a:buNone/>
             </a:pPr>
             <a:r>
@@ -11701,7 +11701,7 @@
           <a:bodyPr wrap="square" lIns="0" tIns="0" rIns="0" bIns="0" rtlCol="0" anchor="ctr"/>
           <a:lstStyle/>
           <a:p>
-            <a:pPr algn="ctr" indent="0" marL="0">
+            <a:pPr eaLnBrk="0" algn="ctr" indent="0" marL="0">
               <a:buNone/>
             </a:pPr>
             <a:r>
@@ -11718,7 +11718,7 @@
             <a:endParaRPr lang="ko-KR" sz="2600" dirty="0"/>
           </a:p>
           <a:p>
-            <a:pPr algn="ctr" indent="0" marL="0">
+            <a:pPr eaLnBrk="0" algn="ctr" indent="0" marL="0">
               <a:buNone/>
             </a:pPr>
             <a:r>
@@ -11735,7 +11735,7 @@
             <a:endParaRPr lang="ko-KR" sz="2600" dirty="0"/>
           </a:p>
           <a:p>
-            <a:pPr algn="ctr" indent="0" marL="0">
+            <a:pPr eaLnBrk="0" algn="ctr" indent="0" marL="0">
               <a:buNone/>
             </a:pPr>
             <a:r>
@@ -11782,7 +11782,7 @@
           <a:bodyPr wrap="square" lIns="0" tIns="0" rIns="0" bIns="0" rtlCol="0" anchor="ctr"/>
           <a:lstStyle/>
           <a:p>
-            <a:pPr algn="ctr" indent="0" marL="0">
+            <a:pPr eaLnBrk="0" algn="ctr" indent="0" marL="0">
               <a:buNone/>
             </a:pPr>
             <a:r>
@@ -11821,7 +11821,7 @@
           <a:bodyPr wrap="square" lIns="0" tIns="0" rIns="0" bIns="0" rtlCol="0" anchor="ctr"/>
           <a:lstStyle/>
           <a:p>
-            <a:pPr algn="ctr" indent="0" marL="0">
+            <a:pPr eaLnBrk="0" algn="ctr" indent="0" marL="0">
               <a:buNone/>
             </a:pPr>
             <a:r>
@@ -11838,7 +11838,7 @@
             <a:endParaRPr lang="ko-KR" sz="2600" dirty="0"/>
           </a:p>
           <a:p>
-            <a:pPr algn="ctr" indent="0" marL="0">
+            <a:pPr eaLnBrk="0" algn="ctr" indent="0" marL="0">
               <a:buNone/>
             </a:pPr>
             <a:r>
@@ -11855,7 +11855,7 @@
             <a:endParaRPr lang="ko-KR" sz="2600" dirty="0"/>
           </a:p>
           <a:p>
-            <a:pPr algn="ctr" indent="0" marL="0">
+            <a:pPr eaLnBrk="0" algn="ctr" indent="0" marL="0">
               <a:buNone/>
             </a:pPr>
             <a:r>
@@ -11902,7 +11902,7 @@
           <a:bodyPr wrap="square" lIns="0" tIns="0" rIns="0" bIns="0" rtlCol="0" anchor="ctr"/>
           <a:lstStyle/>
           <a:p>
-            <a:pPr algn="ctr" indent="0" marL="0">
+            <a:pPr eaLnBrk="0" algn="ctr" indent="0" marL="0">
               <a:buNone/>
             </a:pPr>
             <a:r>
@@ -11941,7 +11941,7 @@
           <a:bodyPr wrap="square" lIns="0" tIns="0" rIns="0" bIns="0" rtlCol="0" anchor="ctr"/>
           <a:lstStyle/>
           <a:p>
-            <a:pPr algn="ctr" indent="0" marL="0">
+            <a:pPr eaLnBrk="0" algn="ctr" indent="0" marL="0">
               <a:buNone/>
             </a:pPr>
             <a:r>
@@ -11958,7 +11958,7 @@
             <a:endParaRPr lang="ko-KR" sz="2600" dirty="0"/>
           </a:p>
           <a:p>
-            <a:pPr algn="ctr" indent="0" marL="0">
+            <a:pPr eaLnBrk="0" algn="ctr" indent="0" marL="0">
               <a:buNone/>
             </a:pPr>
             <a:r>
@@ -11975,7 +11975,7 @@
             <a:endParaRPr lang="ko-KR" sz="2600" dirty="0"/>
           </a:p>
           <a:p>
-            <a:pPr algn="ctr" indent="0" marL="0">
+            <a:pPr eaLnBrk="0" algn="ctr" indent="0" marL="0">
               <a:buNone/>
             </a:pPr>
             <a:r>
@@ -12022,7 +12022,7 @@
           <a:bodyPr wrap="square" lIns="0" tIns="0" rIns="0" bIns="0" rtlCol="0" anchor="ctr"/>
           <a:lstStyle/>
           <a:p>
-            <a:pPr algn="ctr" indent="0" marL="0">
+            <a:pPr eaLnBrk="0" algn="ctr" indent="0" marL="0">
               <a:buNone/>
             </a:pPr>
             <a:r>
@@ -12061,7 +12061,7 @@
           <a:bodyPr wrap="square" lIns="0" tIns="0" rIns="0" bIns="0" rtlCol="0" anchor="ctr"/>
           <a:lstStyle/>
           <a:p>
-            <a:pPr algn="ctr" indent="0" marL="0">
+            <a:pPr eaLnBrk="0" algn="ctr" indent="0" marL="0">
               <a:buNone/>
             </a:pPr>
             <a:r>
@@ -12078,7 +12078,7 @@
             <a:endParaRPr lang="ko-KR" sz="2600" dirty="0"/>
           </a:p>
           <a:p>
-            <a:pPr algn="ctr" indent="0" marL="0">
+            <a:pPr eaLnBrk="0" algn="ctr" indent="0" marL="0">
               <a:buNone/>
             </a:pPr>
             <a:r>
@@ -12095,7 +12095,7 @@
             <a:endParaRPr lang="ko-KR" sz="2600" dirty="0"/>
           </a:p>
           <a:p>
-            <a:pPr algn="ctr" indent="0" marL="0">
+            <a:pPr eaLnBrk="0" algn="ctr" indent="0" marL="0">
               <a:buNone/>
             </a:pPr>
             <a:r>
@@ -12152,7 +12152,7 @@
             </a:lvl1pPr>
           </a:lstStyle>
           <a:p>
-            <a:pPr algn="r"/>
+            <a:pPr eaLnBrk="0" algn="r"/>
             <a:fld id="{F7021451-1387-4CA6-816F-3879F97B5CBC}" type="slidenum">
               <a:rPr b="0" lang="en-US"/>
               <a:t>8</a:t>
@@ -12209,7 +12209,7 @@
           <a:bodyPr wrap="square" lIns="0" tIns="0" rIns="0" bIns="0" rtlCol="0" anchor="ctr"/>
           <a:lstStyle/>
           <a:p>
-            <a:pPr algn="l" indent="0" marL="0">
+            <a:pPr eaLnBrk="0" algn="l" indent="0" marL="0">
               <a:buNone/>
             </a:pPr>
             <a:r>
@@ -12275,7 +12275,7 @@
           <a:bodyPr wrap="square" lIns="0" tIns="0" rIns="0" bIns="0" rtlCol="0" anchor="ctr"/>
           <a:lstStyle/>
           <a:p>
-            <a:pPr indent="0" marL="0">
+            <a:pPr eaLnBrk="0" indent="0" marL="0">
               <a:spcAft>
                 <a:spcPts val="600"/>
               </a:spcAft>
@@ -12325,7 +12325,7 @@
           <a:bodyPr wrap="square" lIns="0" tIns="0" rIns="0" bIns="0" rtlCol="0" anchor="ctr"/>
           <a:lstStyle/>
           <a:p>
-            <a:pPr algn="ctr" indent="0" marL="0">
+            <a:pPr eaLnBrk="0" algn="ctr" indent="0" marL="0">
               <a:buNone/>
             </a:pPr>
             <a:r>
@@ -12364,7 +12364,7 @@
           <a:bodyPr wrap="square" lIns="0" tIns="0" rIns="0" bIns="0" rtlCol="0" anchor="ctr"/>
           <a:lstStyle/>
           <a:p>
-            <a:pPr algn="ctr" indent="0" marL="0">
+            <a:pPr eaLnBrk="0" algn="ctr" indent="0" marL="0">
               <a:buNone/>
             </a:pPr>
             <a:r>
@@ -12381,7 +12381,7 @@
             <a:endParaRPr lang="ko-KR" sz="2600" dirty="0"/>
           </a:p>
           <a:p>
-            <a:pPr algn="ctr" indent="0" marL="0">
+            <a:pPr eaLnBrk="0" algn="ctr" indent="0" marL="0">
               <a:buNone/>
             </a:pPr>
             <a:r>
@@ -12398,7 +12398,7 @@
             <a:endParaRPr lang="ko-KR" sz="2600" dirty="0"/>
           </a:p>
           <a:p>
-            <a:pPr algn="ctr" indent="0" marL="0">
+            <a:pPr eaLnBrk="0" algn="ctr" indent="0" marL="0">
               <a:buNone/>
             </a:pPr>
             <a:r>
@@ -12445,7 +12445,7 @@
           <a:bodyPr wrap="square" lIns="0" tIns="0" rIns="0" bIns="0" rtlCol="0" anchor="ctr"/>
           <a:lstStyle/>
           <a:p>
-            <a:pPr algn="ctr" indent="0" marL="0">
+            <a:pPr eaLnBrk="0" algn="ctr" indent="0" marL="0">
               <a:buNone/>
             </a:pPr>
             <a:r>
@@ -12484,7 +12484,7 @@
           <a:bodyPr wrap="square" lIns="0" tIns="0" rIns="0" bIns="0" rtlCol="0" anchor="ctr"/>
           <a:lstStyle/>
           <a:p>
-            <a:pPr algn="ctr" indent="0" marL="0">
+            <a:pPr eaLnBrk="0" algn="ctr" indent="0" marL="0">
               <a:buNone/>
             </a:pPr>
             <a:r>
@@ -12501,7 +12501,7 @@
             <a:endParaRPr lang="ko-KR" sz="2600" dirty="0"/>
           </a:p>
           <a:p>
-            <a:pPr algn="ctr" indent="0" marL="0">
+            <a:pPr eaLnBrk="0" algn="ctr" indent="0" marL="0">
               <a:buNone/>
             </a:pPr>
             <a:r>
@@ -12518,7 +12518,7 @@
             <a:endParaRPr lang="ko-KR" sz="2600" dirty="0"/>
           </a:p>
           <a:p>
-            <a:pPr algn="ctr" indent="0" marL="0">
+            <a:pPr eaLnBrk="0" algn="ctr" indent="0" marL="0">
               <a:buNone/>
             </a:pPr>
             <a:r>
@@ -12565,7 +12565,7 @@
           <a:bodyPr wrap="square" lIns="0" tIns="0" rIns="0" bIns="0" rtlCol="0" anchor="ctr"/>
           <a:lstStyle/>
           <a:p>
-            <a:pPr algn="ctr" indent="0" marL="0">
+            <a:pPr eaLnBrk="0" algn="ctr" indent="0" marL="0">
               <a:buNone/>
             </a:pPr>
             <a:r>
@@ -12604,7 +12604,7 @@
           <a:bodyPr wrap="square" lIns="0" tIns="0" rIns="0" bIns="0" rtlCol="0" anchor="ctr"/>
           <a:lstStyle/>
           <a:p>
-            <a:pPr algn="ctr" indent="0" marL="0">
+            <a:pPr eaLnBrk="0" algn="ctr" indent="0" marL="0">
               <a:buNone/>
             </a:pPr>
             <a:r>
@@ -12621,7 +12621,7 @@
             <a:endParaRPr lang="ko-KR" sz="2600" dirty="0"/>
           </a:p>
           <a:p>
-            <a:pPr algn="ctr" indent="0" marL="0">
+            <a:pPr eaLnBrk="0" algn="ctr" indent="0" marL="0">
               <a:buNone/>
             </a:pPr>
             <a:r>
@@ -12638,7 +12638,7 @@
             <a:endParaRPr lang="ko-KR" sz="2600" dirty="0"/>
           </a:p>
           <a:p>
-            <a:pPr algn="ctr" indent="0" marL="0">
+            <a:pPr eaLnBrk="0" algn="ctr" indent="0" marL="0">
               <a:buNone/>
             </a:pPr>
             <a:r>
@@ -12685,7 +12685,7 @@
           <a:bodyPr wrap="square" lIns="0" tIns="0" rIns="0" bIns="0" rtlCol="0" anchor="ctr"/>
           <a:lstStyle/>
           <a:p>
-            <a:pPr algn="ctr" indent="0" marL="0">
+            <a:pPr eaLnBrk="0" algn="ctr" indent="0" marL="0">
               <a:buNone/>
             </a:pPr>
             <a:r>
@@ -12724,7 +12724,7 @@
           <a:bodyPr wrap="square" lIns="0" tIns="0" rIns="0" bIns="0" rtlCol="0" anchor="ctr"/>
           <a:lstStyle/>
           <a:p>
-            <a:pPr algn="ctr" indent="0" marL="0">
+            <a:pPr eaLnBrk="0" algn="ctr" indent="0" marL="0">
               <a:buNone/>
             </a:pPr>
             <a:r>
@@ -12741,7 +12741,7 @@
             <a:endParaRPr lang="ko-KR" sz="2600" dirty="0"/>
           </a:p>
           <a:p>
-            <a:pPr algn="ctr" indent="0" marL="0">
+            <a:pPr eaLnBrk="0" algn="ctr" indent="0" marL="0">
               <a:buNone/>
             </a:pPr>
             <a:r>
@@ -12758,7 +12758,7 @@
             <a:endParaRPr lang="ko-KR" sz="2600" dirty="0"/>
           </a:p>
           <a:p>
-            <a:pPr algn="ctr" indent="0" marL="0">
+            <a:pPr eaLnBrk="0" algn="ctr" indent="0" marL="0">
               <a:buNone/>
             </a:pPr>
             <a:r>
@@ -12815,7 +12815,7 @@
             </a:lvl1pPr>
           </a:lstStyle>
           <a:p>
-            <a:pPr algn="r"/>
+            <a:pPr eaLnBrk="0" algn="r"/>
             <a:fld id="{F7021451-1387-4CA6-816F-3879F97B5CBC}" type="slidenum">
               <a:rPr b="0" lang="en-US"/>
               <a:t>9</a:t>

--- a/dist/초1/수학/수와연산/초1_수학_수와연산_03_가르기와모으기.pptx
+++ b/dist/초1/수학/수와연산/초1_수학_수와연산_03_가르기와모으기.pptx
@@ -121,13 +121,13 @@
   <p:extLst>
     <p:ext uri="{521415D9-36F7-43E2-AB2F-B90AF26B5E84}">
       <p14:sectionLst xmlns:p14="http://schemas.microsoft.com/office/powerpoint/2010/main">
-        <p14:section name="도입" id="{cc732871-a3ce-f9d6-0544-9550d9390663}">
+        <p14:section name="도입" id="{9c9f6990-3e82-bc5f-4f5e-17d21afda799}">
           <p14:sldIdLst>
             <p14:sldId id="256"/>
             <p14:sldId id="257"/>
           </p14:sldIdLst>
         </p14:section>
-        <p14:section name="개념" id="{af022fa3-2f8a-ac96-d099-130788791128}">
+        <p14:section name="개념" id="{df9479d4-942b-52b5-8968-b167f8f3a05c}">
           <p14:sldIdLst>
             <p14:sldId id="258"/>
             <p14:sldId id="259"/>
@@ -136,26 +136,26 @@
             <p14:sldId id="262"/>
           </p14:sldIdLst>
         </p14:section>
-        <p14:section name="연습" id="{f5a01368-7a36-fa24-6f7d-6b4a864a7be4}">
+        <p14:section name="연습" id="{64e1afac-18b3-9724-25b3-67bf8d9176b5}">
           <p14:sldIdLst>
             <p14:sldId id="263"/>
             <p14:sldId id="264"/>
             <p14:sldId id="265"/>
           </p14:sldIdLst>
         </p14:section>
-        <p14:section name="확인" id="{150d466e-0b23-14cd-8390-28b4512f1f3d}">
+        <p14:section name="확인" id="{a7b4854d-bb0c-17c4-75b7-d0fbb2cbe798}">
           <p14:sldIdLst>
             <p14:sldId id="266"/>
             <p14:sldId id="267"/>
             <p14:sldId id="268"/>
           </p14:sldIdLst>
         </p14:section>
-        <p14:section name="정리" id="{94062f0b-aa40-49ab-b660-7c13850dbe1b}">
+        <p14:section name="정리" id="{8b3bac79-e68b-8522-9d29-646b02fab190}">
           <p14:sldIdLst>
             <p14:sldId id="269"/>
           </p14:sldIdLst>
         </p14:section>
-        <p14:section name="보충" id="{32aed304-d63b-75e8-9522-49efbe7e2f65}">
+        <p14:section name="보충" id="{87da7dda-922b-8025-8ad8-6afc96fd3fb8}">
           <p14:sldIdLst>
             <p14:sldId id="270"/>
           </p14:sldIdLst>
@@ -7210,7 +7210,7 @@
         </p:nvSpPr>
         <p:spPr>
           <a:xfrm>
-            <a:off x="548640" y="1773936"/>
+            <a:off x="548640" y="1796796"/>
             <a:ext cx="566928" cy="566928"/>
           </a:xfrm>
           <a:prstGeom prst="roundRect">
@@ -7257,8 +7257,8 @@
         </p:nvSpPr>
         <p:spPr>
           <a:xfrm>
-            <a:off x="1618488" y="1325880"/>
-            <a:ext cx="731520" cy="731520"/>
+            <a:off x="2201418" y="1325880"/>
+            <a:ext cx="754380" cy="754380"/>
           </a:xfrm>
           <a:prstGeom prst="rect">
             <a:avLst/>
@@ -7282,8 +7282,8 @@
         </p:nvSpPr>
         <p:spPr>
           <a:xfrm>
-            <a:off x="1742846" y="1450238"/>
-            <a:ext cx="482803" cy="482803"/>
+            <a:off x="2329663" y="1454125"/>
+            <a:ext cx="497891" cy="497891"/>
           </a:xfrm>
           <a:prstGeom prst="ellipse">
             <a:avLst/>
@@ -7307,8 +7307,8 @@
         </p:nvSpPr>
         <p:spPr>
           <a:xfrm>
-            <a:off x="2350008" y="1325880"/>
-            <a:ext cx="731520" cy="731520"/>
+            <a:off x="2955798" y="1325880"/>
+            <a:ext cx="754380" cy="754380"/>
           </a:xfrm>
           <a:prstGeom prst="rect">
             <a:avLst/>
@@ -7332,8 +7332,8 @@
         </p:nvSpPr>
         <p:spPr>
           <a:xfrm>
-            <a:off x="2474366" y="1450238"/>
-            <a:ext cx="482803" cy="482803"/>
+            <a:off x="3084043" y="1454125"/>
+            <a:ext cx="497891" cy="497891"/>
           </a:xfrm>
           <a:prstGeom prst="ellipse">
             <a:avLst/>
@@ -7357,8 +7357,8 @@
         </p:nvSpPr>
         <p:spPr>
           <a:xfrm>
-            <a:off x="3081528" y="1325880"/>
-            <a:ext cx="731520" cy="731520"/>
+            <a:off x="3710178" y="1325880"/>
+            <a:ext cx="754380" cy="754380"/>
           </a:xfrm>
           <a:prstGeom prst="rect">
             <a:avLst/>
@@ -7382,8 +7382,8 @@
         </p:nvSpPr>
         <p:spPr>
           <a:xfrm>
-            <a:off x="3205886" y="1450238"/>
-            <a:ext cx="482803" cy="482803"/>
+            <a:off x="3838423" y="1454125"/>
+            <a:ext cx="497891" cy="497891"/>
           </a:xfrm>
           <a:prstGeom prst="ellipse">
             <a:avLst/>
@@ -7407,8 +7407,8 @@
         </p:nvSpPr>
         <p:spPr>
           <a:xfrm>
-            <a:off x="3813048" y="1325880"/>
-            <a:ext cx="731520" cy="731520"/>
+            <a:off x="4464558" y="1325880"/>
+            <a:ext cx="754380" cy="754380"/>
           </a:xfrm>
           <a:prstGeom prst="rect">
             <a:avLst/>
@@ -7432,8 +7432,8 @@
         </p:nvSpPr>
         <p:spPr>
           <a:xfrm>
-            <a:off x="3937406" y="1450238"/>
-            <a:ext cx="482803" cy="482803"/>
+            <a:off x="4592803" y="1454125"/>
+            <a:ext cx="497891" cy="497891"/>
           </a:xfrm>
           <a:prstGeom prst="ellipse">
             <a:avLst/>
@@ -7457,8 +7457,8 @@
         </p:nvSpPr>
         <p:spPr>
           <a:xfrm>
-            <a:off x="4544568" y="1325880"/>
-            <a:ext cx="731520" cy="731520"/>
+            <a:off x="5218938" y="1325880"/>
+            <a:ext cx="754380" cy="754380"/>
           </a:xfrm>
           <a:prstGeom prst="rect">
             <a:avLst/>
@@ -7482,8 +7482,8 @@
         </p:nvSpPr>
         <p:spPr>
           <a:xfrm>
-            <a:off x="4668926" y="1450238"/>
-            <a:ext cx="482803" cy="482803"/>
+            <a:off x="5347183" y="1454125"/>
+            <a:ext cx="497891" cy="497891"/>
           </a:xfrm>
           <a:prstGeom prst="ellipse">
             <a:avLst/>
@@ -7507,8 +7507,8 @@
         </p:nvSpPr>
         <p:spPr>
           <a:xfrm>
-            <a:off x="1618488" y="2057400"/>
-            <a:ext cx="731520" cy="731520"/>
+            <a:off x="2201418" y="2080260"/>
+            <a:ext cx="754380" cy="754380"/>
           </a:xfrm>
           <a:prstGeom prst="rect">
             <a:avLst/>
@@ -7532,8 +7532,8 @@
         </p:nvSpPr>
         <p:spPr>
           <a:xfrm>
-            <a:off x="1742846" y="2181758"/>
-            <a:ext cx="482803" cy="482803"/>
+            <a:off x="2329663" y="2208505"/>
+            <a:ext cx="497891" cy="497891"/>
           </a:xfrm>
           <a:prstGeom prst="ellipse">
             <a:avLst/>
@@ -7557,8 +7557,8 @@
         </p:nvSpPr>
         <p:spPr>
           <a:xfrm>
-            <a:off x="2350008" y="2057400"/>
-            <a:ext cx="731520" cy="731520"/>
+            <a:off x="2955798" y="2080260"/>
+            <a:ext cx="754380" cy="754380"/>
           </a:xfrm>
           <a:prstGeom prst="rect">
             <a:avLst/>
@@ -7582,8 +7582,8 @@
         </p:nvSpPr>
         <p:spPr>
           <a:xfrm>
-            <a:off x="2474366" y="2181758"/>
-            <a:ext cx="482803" cy="482803"/>
+            <a:off x="3084043" y="2208505"/>
+            <a:ext cx="497891" cy="497891"/>
           </a:xfrm>
           <a:prstGeom prst="ellipse">
             <a:avLst/>
@@ -7607,8 +7607,8 @@
         </p:nvSpPr>
         <p:spPr>
           <a:xfrm>
-            <a:off x="3081528" y="2057400"/>
-            <a:ext cx="731520" cy="731520"/>
+            <a:off x="3710178" y="2080260"/>
+            <a:ext cx="754380" cy="754380"/>
           </a:xfrm>
           <a:prstGeom prst="rect">
             <a:avLst/>
@@ -7632,8 +7632,8 @@
         </p:nvSpPr>
         <p:spPr>
           <a:xfrm>
-            <a:off x="3205886" y="2181758"/>
-            <a:ext cx="482803" cy="482803"/>
+            <a:off x="3838423" y="2208505"/>
+            <a:ext cx="497891" cy="497891"/>
           </a:xfrm>
           <a:prstGeom prst="ellipse">
             <a:avLst/>
@@ -7657,8 +7657,8 @@
         </p:nvSpPr>
         <p:spPr>
           <a:xfrm>
-            <a:off x="3813048" y="2057400"/>
-            <a:ext cx="731520" cy="731520"/>
+            <a:off x="4464558" y="2080260"/>
+            <a:ext cx="754380" cy="754380"/>
           </a:xfrm>
           <a:prstGeom prst="rect">
             <a:avLst/>
@@ -7682,8 +7682,8 @@
         </p:nvSpPr>
         <p:spPr>
           <a:xfrm>
-            <a:off x="4544568" y="2057400"/>
-            <a:ext cx="731520" cy="731520"/>
+            <a:off x="5218938" y="2080260"/>
+            <a:ext cx="754380" cy="754380"/>
           </a:xfrm>
           <a:prstGeom prst="rect">
             <a:avLst/>
@@ -7707,8 +7707,8 @@
         </p:nvSpPr>
         <p:spPr>
           <a:xfrm>
-            <a:off x="1618488" y="1325880"/>
-            <a:ext cx="3657600" cy="1463040"/>
+            <a:off x="2201418" y="1325880"/>
+            <a:ext cx="3771900" cy="1508760"/>
           </a:xfrm>
           <a:prstGeom prst="rect">
             <a:avLst/>
@@ -11641,7 +11641,7 @@
         </p:nvSpPr>
         <p:spPr>
           <a:xfrm>
-            <a:off x="548640" y="1773936"/>
+            <a:off x="548640" y="1945386"/>
             <a:ext cx="566928" cy="566928"/>
           </a:xfrm>
           <a:prstGeom prst="roundRect">
@@ -11689,7 +11689,7 @@
         <p:spPr>
           <a:xfrm>
             <a:off x="1344168" y="1325880"/>
-            <a:ext cx="4206240" cy="1463040"/>
+            <a:ext cx="4567428" cy="1805940"/>
           </a:xfrm>
           <a:prstGeom prst="rect">
             <a:avLst/>
@@ -11705,7 +11705,7 @@
               <a:buNone/>
             </a:pPr>
             <a:r>
-              <a:rPr lang="ko-KR" altLang="en-US" sz="2600" b="1" dirty="0">
+              <a:rPr lang="ko-KR" altLang="en-US" sz="3600" b="1" dirty="0">
                 <a:solidFill>
                   <a:srgbClr val="1F2937"/>
                 </a:solidFill>
@@ -11715,14 +11715,14 @@
               </a:rPr>
               <a:t>6</a:t>
             </a:r>
-            <a:endParaRPr lang="ko-KR" sz="2600" dirty="0"/>
+            <a:endParaRPr lang="ko-KR" sz="3600" dirty="0"/>
           </a:p>
           <a:p>
             <a:pPr eaLnBrk="0" algn="ctr" indent="0" marL="0">
               <a:buNone/>
             </a:pPr>
             <a:r>
-              <a:rPr lang="ko-KR" altLang="en-US" sz="2600" b="1" dirty="0">
+              <a:rPr lang="ko-KR" altLang="en-US" sz="3600" b="1" dirty="0">
                 <a:solidFill>
                   <a:srgbClr val="1F2937"/>
                 </a:solidFill>
@@ -11732,14 +11732,14 @@
               </a:rPr>
               <a:t>↙    ↘</a:t>
             </a:r>
-            <a:endParaRPr lang="ko-KR" sz="2600" dirty="0"/>
+            <a:endParaRPr lang="ko-KR" sz="3600" dirty="0"/>
           </a:p>
           <a:p>
             <a:pPr eaLnBrk="0" algn="ctr" indent="0" marL="0">
               <a:buNone/>
             </a:pPr>
             <a:r>
-              <a:rPr lang="ko-KR" altLang="en-US" sz="2600" b="1" dirty="0">
+              <a:rPr lang="ko-KR" altLang="en-US" sz="3600" b="1" dirty="0">
                 <a:solidFill>
                   <a:srgbClr val="1F2937"/>
                 </a:solidFill>
@@ -11749,7 +11749,7 @@
               </a:rPr>
               <a:t>2        □</a:t>
             </a:r>
-            <a:endParaRPr lang="ko-KR" sz="2600" dirty="0"/>
+            <a:endParaRPr lang="ko-KR" sz="3600" dirty="0"/>
           </a:p>
         </p:txBody>
       </p:sp>
@@ -11761,7 +11761,7 @@
         </p:nvSpPr>
         <p:spPr>
           <a:xfrm>
-            <a:off x="6277356" y="1773936"/>
+            <a:off x="6277356" y="1945386"/>
             <a:ext cx="566928" cy="566928"/>
           </a:xfrm>
           <a:prstGeom prst="roundRect">
@@ -11809,7 +11809,7 @@
         <p:spPr>
           <a:xfrm>
             <a:off x="7072884" y="1325880"/>
-            <a:ext cx="4206240" cy="1463040"/>
+            <a:ext cx="4567428" cy="1805940"/>
           </a:xfrm>
           <a:prstGeom prst="rect">
             <a:avLst/>
@@ -11825,7 +11825,7 @@
               <a:buNone/>
             </a:pPr>
             <a:r>
-              <a:rPr lang="ko-KR" altLang="en-US" sz="2600" b="1" dirty="0">
+              <a:rPr lang="ko-KR" altLang="en-US" sz="3600" b="1" dirty="0">
                 <a:solidFill>
                   <a:srgbClr val="1F2937"/>
                 </a:solidFill>
@@ -11835,14 +11835,14 @@
               </a:rPr>
               <a:t>8</a:t>
             </a:r>
-            <a:endParaRPr lang="ko-KR" sz="2600" dirty="0"/>
+            <a:endParaRPr lang="ko-KR" sz="3600" dirty="0"/>
           </a:p>
           <a:p>
             <a:pPr eaLnBrk="0" algn="ctr" indent="0" marL="0">
               <a:buNone/>
             </a:pPr>
             <a:r>
-              <a:rPr lang="ko-KR" altLang="en-US" sz="2600" b="1" dirty="0">
+              <a:rPr lang="ko-KR" altLang="en-US" sz="3600" b="1" dirty="0">
                 <a:solidFill>
                   <a:srgbClr val="1F2937"/>
                 </a:solidFill>
@@ -11852,14 +11852,14 @@
               </a:rPr>
               <a:t>↙    ↘</a:t>
             </a:r>
-            <a:endParaRPr lang="ko-KR" sz="2600" dirty="0"/>
+            <a:endParaRPr lang="ko-KR" sz="3600" dirty="0"/>
           </a:p>
           <a:p>
             <a:pPr eaLnBrk="0" algn="ctr" indent="0" marL="0">
               <a:buNone/>
             </a:pPr>
             <a:r>
-              <a:rPr lang="ko-KR" altLang="en-US" sz="2600" b="1" dirty="0">
+              <a:rPr lang="ko-KR" altLang="en-US" sz="3600" b="1" dirty="0">
                 <a:solidFill>
                   <a:srgbClr val="1F2937"/>
                 </a:solidFill>
@@ -11869,7 +11869,7 @@
               </a:rPr>
               <a:t>□        5</a:t>
             </a:r>
-            <a:endParaRPr lang="ko-KR" sz="2600" dirty="0"/>
+            <a:endParaRPr lang="ko-KR" sz="3600" dirty="0"/>
           </a:p>
         </p:txBody>
       </p:sp>
@@ -11881,7 +11881,7 @@
         </p:nvSpPr>
         <p:spPr>
           <a:xfrm>
-            <a:off x="548640" y="3762756"/>
+            <a:off x="548640" y="3934206"/>
             <a:ext cx="566928" cy="566928"/>
           </a:xfrm>
           <a:prstGeom prst="roundRect">
@@ -11929,7 +11929,7 @@
         <p:spPr>
           <a:xfrm>
             <a:off x="1344168" y="3314700"/>
-            <a:ext cx="4206240" cy="1463040"/>
+            <a:ext cx="4567428" cy="1805940"/>
           </a:xfrm>
           <a:prstGeom prst="rect">
             <a:avLst/>
@@ -11945,7 +11945,7 @@
               <a:buNone/>
             </a:pPr>
             <a:r>
-              <a:rPr lang="ko-KR" altLang="en-US" sz="2600" b="1" dirty="0">
+              <a:rPr lang="ko-KR" altLang="en-US" sz="3600" b="1" dirty="0">
                 <a:solidFill>
                   <a:srgbClr val="1F2937"/>
                 </a:solidFill>
@@ -11955,14 +11955,14 @@
               </a:rPr>
               <a:t>9</a:t>
             </a:r>
-            <a:endParaRPr lang="ko-KR" sz="2600" dirty="0"/>
+            <a:endParaRPr lang="ko-KR" sz="3600" dirty="0"/>
           </a:p>
           <a:p>
             <a:pPr eaLnBrk="0" algn="ctr" indent="0" marL="0">
               <a:buNone/>
             </a:pPr>
             <a:r>
-              <a:rPr lang="ko-KR" altLang="en-US" sz="2600" b="1" dirty="0">
+              <a:rPr lang="ko-KR" altLang="en-US" sz="3600" b="1" dirty="0">
                 <a:solidFill>
                   <a:srgbClr val="1F2937"/>
                 </a:solidFill>
@@ -11972,14 +11972,14 @@
               </a:rPr>
               <a:t>↙    ↘</a:t>
             </a:r>
-            <a:endParaRPr lang="ko-KR" sz="2600" dirty="0"/>
+            <a:endParaRPr lang="ko-KR" sz="3600" dirty="0"/>
           </a:p>
           <a:p>
             <a:pPr eaLnBrk="0" algn="ctr" indent="0" marL="0">
               <a:buNone/>
             </a:pPr>
             <a:r>
-              <a:rPr lang="ko-KR" altLang="en-US" sz="2600" b="1" dirty="0">
+              <a:rPr lang="ko-KR" altLang="en-US" sz="3600" b="1" dirty="0">
                 <a:solidFill>
                   <a:srgbClr val="1F2937"/>
                 </a:solidFill>
@@ -11989,7 +11989,7 @@
               </a:rPr>
               <a:t>4        □</a:t>
             </a:r>
-            <a:endParaRPr lang="ko-KR" sz="2600" dirty="0"/>
+            <a:endParaRPr lang="ko-KR" sz="3600" dirty="0"/>
           </a:p>
         </p:txBody>
       </p:sp>
@@ -12001,7 +12001,7 @@
         </p:nvSpPr>
         <p:spPr>
           <a:xfrm>
-            <a:off x="6277356" y="3762756"/>
+            <a:off x="6277356" y="3934206"/>
             <a:ext cx="566928" cy="566928"/>
           </a:xfrm>
           <a:prstGeom prst="roundRect">
@@ -12049,7 +12049,7 @@
         <p:spPr>
           <a:xfrm>
             <a:off x="7072884" y="3314700"/>
-            <a:ext cx="4206240" cy="1463040"/>
+            <a:ext cx="4567428" cy="1805940"/>
           </a:xfrm>
           <a:prstGeom prst="rect">
             <a:avLst/>
@@ -12065,7 +12065,7 @@
               <a:buNone/>
             </a:pPr>
             <a:r>
-              <a:rPr lang="ko-KR" altLang="en-US" sz="2600" b="1" dirty="0">
+              <a:rPr lang="ko-KR" altLang="en-US" sz="3600" b="1" dirty="0">
                 <a:solidFill>
                   <a:srgbClr val="1F2937"/>
                 </a:solidFill>
@@ -12075,14 +12075,14 @@
               </a:rPr>
               <a:t>10</a:t>
             </a:r>
-            <a:endParaRPr lang="ko-KR" sz="2600" dirty="0"/>
+            <a:endParaRPr lang="ko-KR" sz="3600" dirty="0"/>
           </a:p>
           <a:p>
             <a:pPr eaLnBrk="0" algn="ctr" indent="0" marL="0">
               <a:buNone/>
             </a:pPr>
             <a:r>
-              <a:rPr lang="ko-KR" altLang="en-US" sz="2600" b="1" dirty="0">
+              <a:rPr lang="ko-KR" altLang="en-US" sz="3600" b="1" dirty="0">
                 <a:solidFill>
                   <a:srgbClr val="1F2937"/>
                 </a:solidFill>
@@ -12092,14 +12092,14 @@
               </a:rPr>
               <a:t>↙    ↘</a:t>
             </a:r>
-            <a:endParaRPr lang="ko-KR" sz="2600" dirty="0"/>
+            <a:endParaRPr lang="ko-KR" sz="3600" dirty="0"/>
           </a:p>
           <a:p>
             <a:pPr eaLnBrk="0" algn="ctr" indent="0" marL="0">
               <a:buNone/>
             </a:pPr>
             <a:r>
-              <a:rPr lang="ko-KR" altLang="en-US" sz="2600" b="1" dirty="0">
+              <a:rPr lang="ko-KR" altLang="en-US" sz="3600" b="1" dirty="0">
                 <a:solidFill>
                   <a:srgbClr val="1F2937"/>
                 </a:solidFill>
@@ -12109,7 +12109,7 @@
               </a:rPr>
               <a:t>7        □</a:t>
             </a:r>
-            <a:endParaRPr lang="ko-KR" sz="2600" dirty="0"/>
+            <a:endParaRPr lang="ko-KR" sz="3600" dirty="0"/>
           </a:p>
         </p:txBody>
       </p:sp>
@@ -12304,7 +12304,7 @@
         </p:nvSpPr>
         <p:spPr>
           <a:xfrm>
-            <a:off x="548640" y="1773936"/>
+            <a:off x="548640" y="1945386"/>
             <a:ext cx="566928" cy="566928"/>
           </a:xfrm>
           <a:prstGeom prst="roundRect">
@@ -12352,7 +12352,7 @@
         <p:spPr>
           <a:xfrm>
             <a:off x="1344168" y="1325880"/>
-            <a:ext cx="4206240" cy="1463040"/>
+            <a:ext cx="4567428" cy="1805940"/>
           </a:xfrm>
           <a:prstGeom prst="rect">
             <a:avLst/>
@@ -12368,7 +12368,7 @@
               <a:buNone/>
             </a:pPr>
             <a:r>
-              <a:rPr lang="ko-KR" altLang="en-US" sz="2600" b="1" dirty="0">
+              <a:rPr lang="ko-KR" altLang="en-US" sz="3600" b="1" dirty="0">
                 <a:solidFill>
                   <a:srgbClr val="1F2937"/>
                 </a:solidFill>
@@ -12378,14 +12378,14 @@
               </a:rPr>
               <a:t>2        5</a:t>
             </a:r>
-            <a:endParaRPr lang="ko-KR" sz="2600" dirty="0"/>
+            <a:endParaRPr lang="ko-KR" sz="3600" dirty="0"/>
           </a:p>
           <a:p>
             <a:pPr eaLnBrk="0" algn="ctr" indent="0" marL="0">
               <a:buNone/>
             </a:pPr>
             <a:r>
-              <a:rPr lang="ko-KR" altLang="en-US" sz="2600" b="1" dirty="0">
+              <a:rPr lang="ko-KR" altLang="en-US" sz="3600" b="1" dirty="0">
                 <a:solidFill>
                   <a:srgbClr val="1F2937"/>
                 </a:solidFill>
@@ -12395,14 +12395,14 @@
               </a:rPr>
               <a:t>↘    ↙</a:t>
             </a:r>
-            <a:endParaRPr lang="ko-KR" sz="2600" dirty="0"/>
+            <a:endParaRPr lang="ko-KR" sz="3600" dirty="0"/>
           </a:p>
           <a:p>
             <a:pPr eaLnBrk="0" algn="ctr" indent="0" marL="0">
               <a:buNone/>
             </a:pPr>
             <a:r>
-              <a:rPr lang="ko-KR" altLang="en-US" sz="2600" b="1" dirty="0">
+              <a:rPr lang="ko-KR" altLang="en-US" sz="3600" b="1" dirty="0">
                 <a:solidFill>
                   <a:srgbClr val="1F2937"/>
                 </a:solidFill>
@@ -12412,7 +12412,7 @@
               </a:rPr>
               <a:t>□</a:t>
             </a:r>
-            <a:endParaRPr lang="ko-KR" sz="2600" dirty="0"/>
+            <a:endParaRPr lang="ko-KR" sz="3600" dirty="0"/>
           </a:p>
         </p:txBody>
       </p:sp>
@@ -12424,7 +12424,7 @@
         </p:nvSpPr>
         <p:spPr>
           <a:xfrm>
-            <a:off x="6277356" y="1773936"/>
+            <a:off x="6277356" y="1945386"/>
             <a:ext cx="566928" cy="566928"/>
           </a:xfrm>
           <a:prstGeom prst="roundRect">
@@ -12472,7 +12472,7 @@
         <p:spPr>
           <a:xfrm>
             <a:off x="7072884" y="1325880"/>
-            <a:ext cx="4206240" cy="1463040"/>
+            <a:ext cx="4567428" cy="1805940"/>
           </a:xfrm>
           <a:prstGeom prst="rect">
             <a:avLst/>
@@ -12488,7 +12488,7 @@
               <a:buNone/>
             </a:pPr>
             <a:r>
-              <a:rPr lang="ko-KR" altLang="en-US" sz="2600" b="1" dirty="0">
+              <a:rPr lang="ko-KR" altLang="en-US" sz="3600" b="1" dirty="0">
                 <a:solidFill>
                   <a:srgbClr val="1F2937"/>
                 </a:solidFill>
@@ -12498,14 +12498,14 @@
               </a:rPr>
               <a:t>4        4</a:t>
             </a:r>
-            <a:endParaRPr lang="ko-KR" sz="2600" dirty="0"/>
+            <a:endParaRPr lang="ko-KR" sz="3600" dirty="0"/>
           </a:p>
           <a:p>
             <a:pPr eaLnBrk="0" algn="ctr" indent="0" marL="0">
               <a:buNone/>
             </a:pPr>
             <a:r>
-              <a:rPr lang="ko-KR" altLang="en-US" sz="2600" b="1" dirty="0">
+              <a:rPr lang="ko-KR" altLang="en-US" sz="3600" b="1" dirty="0">
                 <a:solidFill>
                   <a:srgbClr val="1F2937"/>
                 </a:solidFill>
@@ -12515,14 +12515,14 @@
               </a:rPr>
               <a:t>↘    ↙</a:t>
             </a:r>
-            <a:endParaRPr lang="ko-KR" sz="2600" dirty="0"/>
+            <a:endParaRPr lang="ko-KR" sz="3600" dirty="0"/>
           </a:p>
           <a:p>
             <a:pPr eaLnBrk="0" algn="ctr" indent="0" marL="0">
               <a:buNone/>
             </a:pPr>
             <a:r>
-              <a:rPr lang="ko-KR" altLang="en-US" sz="2600" b="1" dirty="0">
+              <a:rPr lang="ko-KR" altLang="en-US" sz="3600" b="1" dirty="0">
                 <a:solidFill>
                   <a:srgbClr val="1F2937"/>
                 </a:solidFill>
@@ -12532,7 +12532,7 @@
               </a:rPr>
               <a:t>□</a:t>
             </a:r>
-            <a:endParaRPr lang="ko-KR" sz="2600" dirty="0"/>
+            <a:endParaRPr lang="ko-KR" sz="3600" dirty="0"/>
           </a:p>
         </p:txBody>
       </p:sp>
@@ -12544,7 +12544,7 @@
         </p:nvSpPr>
         <p:spPr>
           <a:xfrm>
-            <a:off x="548640" y="3762756"/>
+            <a:off x="548640" y="3934206"/>
             <a:ext cx="566928" cy="566928"/>
           </a:xfrm>
           <a:prstGeom prst="roundRect">
@@ -12592,7 +12592,7 @@
         <p:spPr>
           <a:xfrm>
             <a:off x="1344168" y="3314700"/>
-            <a:ext cx="4206240" cy="1463040"/>
+            <a:ext cx="4567428" cy="1805940"/>
           </a:xfrm>
           <a:prstGeom prst="rect">
             <a:avLst/>
@@ -12608,7 +12608,7 @@
               <a:buNone/>
             </a:pPr>
             <a:r>
-              <a:rPr lang="ko-KR" altLang="en-US" sz="2600" b="1" dirty="0">
+              <a:rPr lang="ko-KR" altLang="en-US" sz="3600" b="1" dirty="0">
                 <a:solidFill>
                   <a:srgbClr val="1F2937"/>
                 </a:solidFill>
@@ -12618,14 +12618,14 @@
               </a:rPr>
               <a:t>6        3</a:t>
             </a:r>
-            <a:endParaRPr lang="ko-KR" sz="2600" dirty="0"/>
+            <a:endParaRPr lang="ko-KR" sz="3600" dirty="0"/>
           </a:p>
           <a:p>
             <a:pPr eaLnBrk="0" algn="ctr" indent="0" marL="0">
               <a:buNone/>
             </a:pPr>
             <a:r>
-              <a:rPr lang="ko-KR" altLang="en-US" sz="2600" b="1" dirty="0">
+              <a:rPr lang="ko-KR" altLang="en-US" sz="3600" b="1" dirty="0">
                 <a:solidFill>
                   <a:srgbClr val="1F2937"/>
                 </a:solidFill>
@@ -12635,14 +12635,14 @@
               </a:rPr>
               <a:t>↘    ↙</a:t>
             </a:r>
-            <a:endParaRPr lang="ko-KR" sz="2600" dirty="0"/>
+            <a:endParaRPr lang="ko-KR" sz="3600" dirty="0"/>
           </a:p>
           <a:p>
             <a:pPr eaLnBrk="0" algn="ctr" indent="0" marL="0">
               <a:buNone/>
             </a:pPr>
             <a:r>
-              <a:rPr lang="ko-KR" altLang="en-US" sz="2600" b="1" dirty="0">
+              <a:rPr lang="ko-KR" altLang="en-US" sz="3600" b="1" dirty="0">
                 <a:solidFill>
                   <a:srgbClr val="1F2937"/>
                 </a:solidFill>
@@ -12652,7 +12652,7 @@
               </a:rPr>
               <a:t>□</a:t>
             </a:r>
-            <a:endParaRPr lang="ko-KR" sz="2600" dirty="0"/>
+            <a:endParaRPr lang="ko-KR" sz="3600" dirty="0"/>
           </a:p>
         </p:txBody>
       </p:sp>
@@ -12664,7 +12664,7 @@
         </p:nvSpPr>
         <p:spPr>
           <a:xfrm>
-            <a:off x="6277356" y="3762756"/>
+            <a:off x="6277356" y="3934206"/>
             <a:ext cx="566928" cy="566928"/>
           </a:xfrm>
           <a:prstGeom prst="roundRect">
@@ -12712,7 +12712,7 @@
         <p:spPr>
           <a:xfrm>
             <a:off x="7072884" y="3314700"/>
-            <a:ext cx="4206240" cy="1463040"/>
+            <a:ext cx="4567428" cy="1805940"/>
           </a:xfrm>
           <a:prstGeom prst="rect">
             <a:avLst/>
@@ -12728,7 +12728,7 @@
               <a:buNone/>
             </a:pPr>
             <a:r>
-              <a:rPr lang="ko-KR" altLang="en-US" sz="2600" b="1" dirty="0">
+              <a:rPr lang="ko-KR" altLang="en-US" sz="3600" b="1" dirty="0">
                 <a:solidFill>
                   <a:srgbClr val="1F2937"/>
                 </a:solidFill>
@@ -12738,14 +12738,14 @@
               </a:rPr>
               <a:t>5        5</a:t>
             </a:r>
-            <a:endParaRPr lang="ko-KR" sz="2600" dirty="0"/>
+            <a:endParaRPr lang="ko-KR" sz="3600" dirty="0"/>
           </a:p>
           <a:p>
             <a:pPr eaLnBrk="0" algn="ctr" indent="0" marL="0">
               <a:buNone/>
             </a:pPr>
             <a:r>
-              <a:rPr lang="ko-KR" altLang="en-US" sz="2600" b="1" dirty="0">
+              <a:rPr lang="ko-KR" altLang="en-US" sz="3600" b="1" dirty="0">
                 <a:solidFill>
                   <a:srgbClr val="1F2937"/>
                 </a:solidFill>
@@ -12755,14 +12755,14 @@
               </a:rPr>
               <a:t>↘    ↙</a:t>
             </a:r>
-            <a:endParaRPr lang="ko-KR" sz="2600" dirty="0"/>
+            <a:endParaRPr lang="ko-KR" sz="3600" dirty="0"/>
           </a:p>
           <a:p>
             <a:pPr eaLnBrk="0" algn="ctr" indent="0" marL="0">
               <a:buNone/>
             </a:pPr>
             <a:r>
-              <a:rPr lang="ko-KR" altLang="en-US" sz="2600" b="1" dirty="0">
+              <a:rPr lang="ko-KR" altLang="en-US" sz="3600" b="1" dirty="0">
                 <a:solidFill>
                   <a:srgbClr val="1F2937"/>
                 </a:solidFill>
@@ -12772,7 +12772,7 @@
               </a:rPr>
               <a:t>□</a:t>
             </a:r>
-            <a:endParaRPr lang="ko-KR" sz="2600" dirty="0"/>
+            <a:endParaRPr lang="ko-KR" sz="3600" dirty="0"/>
           </a:p>
         </p:txBody>
       </p:sp>

--- a/dist/초1/수학/수와연산/초1_수학_수와연산_03_가르기와모으기.pptx
+++ b/dist/초1/수학/수와연산/초1_수학_수와연산_03_가르기와모으기.pptx
@@ -121,13 +121,13 @@
   <p:extLst>
     <p:ext uri="{521415D9-36F7-43E2-AB2F-B90AF26B5E84}">
       <p14:sectionLst xmlns:p14="http://schemas.microsoft.com/office/powerpoint/2010/main">
-        <p14:section name="도입" id="{9c9f6990-3e82-bc5f-4f5e-17d21afda799}">
+        <p14:section name="도입" id="{147ecef1-8e58-9f20-e568-24bdbacadbed}">
           <p14:sldIdLst>
             <p14:sldId id="256"/>
             <p14:sldId id="257"/>
           </p14:sldIdLst>
         </p14:section>
-        <p14:section name="개념" id="{df9479d4-942b-52b5-8968-b167f8f3a05c}">
+        <p14:section name="개념" id="{bdbe8e7a-43fd-cc6c-e724-3d7f336a5441}">
           <p14:sldIdLst>
             <p14:sldId id="258"/>
             <p14:sldId id="259"/>
@@ -136,26 +136,26 @@
             <p14:sldId id="262"/>
           </p14:sldIdLst>
         </p14:section>
-        <p14:section name="연습" id="{64e1afac-18b3-9724-25b3-67bf8d9176b5}">
+        <p14:section name="연습" id="{9daaab5c-e978-cc2a-bda7-6d27f6bb0a43}">
           <p14:sldIdLst>
             <p14:sldId id="263"/>
             <p14:sldId id="264"/>
             <p14:sldId id="265"/>
           </p14:sldIdLst>
         </p14:section>
-        <p14:section name="확인" id="{a7b4854d-bb0c-17c4-75b7-d0fbb2cbe798}">
+        <p14:section name="확인" id="{1a9de77a-60c0-a067-1668-6cceaaad0d4e}">
           <p14:sldIdLst>
             <p14:sldId id="266"/>
             <p14:sldId id="267"/>
             <p14:sldId id="268"/>
           </p14:sldIdLst>
         </p14:section>
-        <p14:section name="정리" id="{8b3bac79-e68b-8522-9d29-646b02fab190}">
+        <p14:section name="정리" id="{408c4075-da62-9c13-9c6e-b2405f2247d7}">
           <p14:sldIdLst>
             <p14:sldId id="269"/>
           </p14:sldIdLst>
         </p14:section>
-        <p14:section name="보충" id="{87da7dda-922b-8025-8ad8-6afc96fd3fb8}">
+        <p14:section name="보충" id="{3d9b68bd-d762-4cc2-4a71-7be2c34fdf2e}">
           <p14:sldIdLst>
             <p14:sldId id="270"/>
           </p14:sldIdLst>
@@ -8618,7 +8618,7 @@
           </p:nvPr>
         </p:nvGraphicFramePr>
         <p:xfrm>
-          <a:off x="1979676" y="2590800"/>
+          <a:off x="1979676" y="2621280"/>
           <a:ext cx="8229600" cy="914400"/>
         </p:xfrm>
         <a:graphic>
@@ -8632,7 +8632,7 @@
                 <a:gridCol w="1481328"/>
                 <a:gridCol w="1481328"/>
               </a:tblGrid>
-              <a:tr h="650240">
+              <a:tr h="629920">
                 <a:tc>
                   <a:txBody>
                     <a:bodyPr/>
@@ -8974,7 +8974,7 @@
                   </a:tcPr>
                 </a:tc>
               </a:tr>
-              <a:tr h="650240">
+              <a:tr h="629920">
                 <a:tc>
                   <a:txBody>
                     <a:bodyPr/>
@@ -9316,7 +9316,7 @@
                   </a:tcPr>
                 </a:tc>
               </a:tr>
-              <a:tr h="650240">
+              <a:tr h="629920">
                 <a:tc>
                   <a:txBody>
                     <a:bodyPr/>
